--- a/lecons/F2T/17_S11_L4_P2_Temperate_Soils_Vegetation.pptx
+++ b/lecons/F2T/17_S11_L4_P2_Temperate_Soils_Vegetation.pptx
@@ -56,9 +56,12 @@
     <p:sldId id="304" r:id="rId50"/>
     <p:sldId id="305" r:id="rId51"/>
     <p:sldId id="306" r:id="rId52"/>
+    <p:sldId id="307" r:id="rId53"/>
+    <p:sldId id="308" r:id="rId54"/>
+    <p:sldId id="309" r:id="rId55"/>
   </p:sldIdLst>
   <p:notesMasterIdLst>
-    <p:notesMasterId r:id="rId53"/>
+    <p:notesMasterId r:id="rId56"/>
   </p:notesMasterIdLst>
   <p:sldSz cx="12192000" cy="6858000"/>
   <p:notesSz cx="6858000" cy="12192000"/>
@@ -640,7 +643,7 @@
           <a:p>
             <a:r>
               <a:rPr lang="en-US" dirty="0"/>
-              <a:t>Listen carefully to this situation from real life. On a trip to Europe in November, Samuel sees a forest with yellow and red leaves. Many leaves fall to the ground. In January, the trees have no leaves at all. Think about it, because I am going to ask you some questions.</a:t>
+              <a:t>Listen carefully to this situation from real life. On a trip to Europe in November, Samuel sees a forest with yellow and red leaves falling to the ground. In January, the trees have no leaves at all, but some pine trees are still green. Samuel asks: "Why do some trees lose their leaves in winter and others do not?" Think about it, because I am going to ask you some questions.</a:t>
             </a:r>
             <a:endParaRPr lang="en-US" dirty="0"/>
           </a:p>
@@ -816,7 +819,7 @@
           <a:p>
             <a:r>
               <a:rPr lang="en-US" dirty="0"/>
-              <a:t>Good. Samuel does not know why the trees lose their leaves.</a:t>
+              <a:t>Good. Samuel does not know how temperate plants are adapted to winter.</a:t>
             </a:r>
             <a:endParaRPr lang="en-US" dirty="0"/>
           </a:p>
@@ -904,7 +907,7 @@
           <a:p>
             <a:r>
               <a:rPr lang="en-US" dirty="0"/>
-              <a:t>Question 2: What did he see in November and in January? Think for a moment, then raise your hand to answer.</a:t>
+              <a:t>Question 2: What colour are the leaves in November? Think for a moment, then raise your hand to answer.</a:t>
             </a:r>
             <a:endParaRPr lang="en-US" dirty="0"/>
           </a:p>
@@ -992,7 +995,7 @@
           <a:p>
             <a:r>
               <a:rPr lang="en-US" dirty="0"/>
-              <a:t>Good. Yellow and red leaves in November; no leaves in January.</a:t>
+              <a:t>Good. Yellow and red.</a:t>
             </a:r>
             <a:endParaRPr lang="en-US" dirty="0"/>
           </a:p>
@@ -1080,7 +1083,7 @@
           <a:p>
             <a:r>
               <a:rPr lang="en-US" dirty="0"/>
-              <a:t>Question 3: What happens to the fallen leaves? Think for a moment, then raise your hand to answer.</a:t>
+              <a:t>Question 3: Which trees are still green in January? Think for a moment, then raise your hand to answer.</a:t>
             </a:r>
             <a:endParaRPr lang="en-US" dirty="0"/>
           </a:p>
@@ -1168,7 +1171,7 @@
           <a:p>
             <a:r>
               <a:rPr lang="en-US" dirty="0"/>
-              <a:t>Good. They rot and make the soil rich.</a:t>
+              <a:t>Good. Pine trees (conifers).</a:t>
             </a:r>
             <a:endParaRPr lang="en-US" dirty="0"/>
           </a:p>
@@ -1784,7 +1787,7 @@
           <a:p>
             <a:r>
               <a:rPr lang="en-US" dirty="0"/>
-              <a:t>Activity 2. Look carefully at this picture: a forest of pine trees in winter. Observe every detail before I ask the question.</a:t>
+              <a:t>Activity 2. Look carefully at this picture: conifers with needle leaves. Observe every detail before I ask the question.</a:t>
             </a:r>
             <a:endParaRPr lang="en-US" dirty="0"/>
           </a:p>
@@ -1872,7 +1875,7 @@
           <a:p>
             <a:r>
               <a:rPr lang="en-US" dirty="0"/>
-              <a:t>Here is the question for Activity 2: These trees keep their thin, needle leaves in winter. How do the leaves help them? Take one minute to think and write your answer in your rough notebook.</a:t>
+              <a:t>Here is the question for Activity 2: How do needle leaves help conifers in winter? Take one minute to think and write your answer in your rough notebook.</a:t>
             </a:r>
             <a:endParaRPr lang="en-US" dirty="0"/>
           </a:p>
@@ -1960,7 +1963,7 @@
           <a:p>
             <a:r>
               <a:rPr lang="en-US" dirty="0"/>
-              <a:t>Let us check the answer together. Needle leaves lose little water and the snow slides off.</a:t>
+              <a:t>Let us check the answer together. They lose little water, and the snow slides off.</a:t>
             </a:r>
             <a:endParaRPr lang="en-US" dirty="0"/>
           </a:p>
@@ -2136,7 +2139,7 @@
           <a:p>
             <a:r>
               <a:rPr lang="en-US" dirty="0"/>
-              <a:t>Here is the question for Activity 3: The olive tree has small, hard leaves. How does this help it in the dry summer? Take one minute to think and write your answer in your rough notebook.</a:t>
+              <a:t>Here is the question for Activity 3: How do small, hard leaves help the olive tree in the dry summer? Take one minute to think and write your answer in your rough notebook.</a:t>
             </a:r>
             <a:endParaRPr lang="en-US" dirty="0"/>
           </a:p>
@@ -2224,7 +2227,7 @@
           <a:p>
             <a:r>
               <a:rPr lang="en-US" dirty="0"/>
-              <a:t>Let us check the answer together. Small, hard leaves lose little water.</a:t>
+              <a:t>Let us check the answer together. They lose little water.</a:t>
             </a:r>
             <a:endParaRPr lang="en-US" dirty="0"/>
           </a:p>
@@ -2312,7 +2315,7 @@
           <a:p>
             <a:r>
               <a:rPr lang="en-US" dirty="0"/>
-              <a:t>Activity 4. Look carefully at this picture: a grassland in North America. Observe every detail before I ask the question.</a:t>
+              <a:t>Activity 4. Look carefully at this picture: a grassland. Observe every detail before I ask the question.</a:t>
             </a:r>
             <a:endParaRPr lang="en-US" dirty="0"/>
           </a:p>
@@ -2400,7 +2403,7 @@
           <a:p>
             <a:r>
               <a:rPr lang="en-US" dirty="0"/>
-              <a:t>Here is the question for Activity 4: There are almost no trees here, only grass. Why? Take one minute to think and write your answer in your rough notebook.</a:t>
+              <a:t>Here is the question for Activity 4: Why are there almost no trees here? Take one minute to think and write your answer in your rough notebook.</a:t>
             </a:r>
             <a:endParaRPr lang="en-US" dirty="0"/>
           </a:p>
@@ -2664,7 +2667,7 @@
           <a:p>
             <a:r>
               <a:rPr lang="en-US" dirty="0"/>
-              <a:t>Activity 5. Look carefully at this picture: a dark, rich soil. Observe every detail before I ask the question.</a:t>
+              <a:t>Activity 5. Look carefully at this picture: a black soil. Observe every detail before I ask the question.</a:t>
             </a:r>
             <a:endParaRPr lang="en-US" dirty="0"/>
           </a:p>
@@ -2752,7 +2755,7 @@
           <a:p>
             <a:r>
               <a:rPr lang="en-US" dirty="0"/>
-              <a:t>Here is the question for Activity 5: This black soil is found under grasslands. Why is it good for wheat? Take one minute to think and write your answer in your rough notebook.</a:t>
+              <a:t>Here is the question for Activity 5: Why is this black soil good for wheat? Take one minute to think and write your answer in your rough notebook.</a:t>
             </a:r>
             <a:endParaRPr lang="en-US" dirty="0"/>
           </a:p>
@@ -3016,7 +3019,7 @@
           <a:p>
             <a:r>
               <a:rPr lang="en-US" dirty="0"/>
-              <a:t>Let us copy the definitions. The key terms of this lesson are defined as follows. On this slide we have Deciduous forest and Coniferous forest. Write each point on a new line, with the key term first, and explain it in your own words when we revise.</a:t>
+              <a:t>Let us copy the definitions. The key terms of this lesson are defined as follows. On this slide we have Deciduous tree and Conifer. Write each point on a new line, with the key term first, and explain it in your own words when we revise.</a:t>
             </a:r>
             <a:endParaRPr lang="en-US" dirty="0"/>
           </a:p>
@@ -3104,7 +3107,7 @@
           <a:p>
             <a:r>
               <a:rPr lang="en-US" dirty="0"/>
-              <a:t>Let us copy Vegetation. The temperate region has the following types of vegetation. On this slide we have Deciduous forest and Coniferous forest. Write each point on a new line, with the key term first, and explain it in your own words when we revise. When you finish, we go to the next slide.</a:t>
+              <a:t>Let us copy Vegetation. The temperate region has the following vegetation. Copy the point on Deciduous forests on the left, then draw the diagram on the right: a forest in autumn. Give it a title and label it clearly.</a:t>
             </a:r>
             <a:endParaRPr lang="en-US" dirty="0"/>
           </a:p>
@@ -3192,7 +3195,7 @@
           <a:p>
             <a:r>
               <a:rPr lang="en-US" dirty="0"/>
-              <a:t>We continue with Vegetation. On this slide we have Mediterranean vegetation and Temperate grasslands. Write each point on a new line, with the key term first, and explain it in your own words when we revise.</a:t>
+              <a:t>Copy the point on Coniferous forests on the left, then draw the diagram on the right: conifers. Give it a title and label it clearly.</a:t>
             </a:r>
             <a:endParaRPr lang="en-US" dirty="0"/>
           </a:p>
@@ -3280,7 +3283,7 @@
           <a:p>
             <a:r>
               <a:rPr lang="en-US" dirty="0"/>
-              <a:t>Let us copy Soils. The temperate region has the following types of soils. On this slide we have Brown forest soils and Podzols. Write each point on a new line, with the key term first, and explain it in your own words when we revise. When you finish, we go to the next slide.</a:t>
+              <a:t>We continue with Vegetation. On this slide we have Mediterranean vegetation. Write each point on a new line, with the key term first, and explain it in your own words when we revise.</a:t>
             </a:r>
             <a:endParaRPr lang="en-US" dirty="0"/>
           </a:p>
@@ -3368,7 +3371,7 @@
           <a:p>
             <a:r>
               <a:rPr lang="en-US" dirty="0"/>
-              <a:t>We continue with Soils. On this slide we have Chernozems and Red Mediterranean soils. Write each point on a new line, with the key term first, and explain it in your own words when we revise.</a:t>
+              <a:t>Copy the point on Temperate grasslands on the left, then draw the diagram on the right: a temperate grassland. Give it a title and label it clearly.</a:t>
             </a:r>
             <a:endParaRPr lang="en-US" dirty="0"/>
           </a:p>
@@ -3544,7 +3547,7 @@
           <a:p>
             <a:r>
               <a:rPr lang="en-US" dirty="0"/>
-              <a:t>Now let us check what you have understood. Question 1: Why do deciduous trees lose their leaves in autumn? Answer in your exercise book.</a:t>
+              <a:t>Let us copy Soils. The temperate region has the following soils. On this slide we have Brown forest soils and Podzols. Write each point on a new line, with the key term first, and explain it in your own words when we revise.</a:t>
             </a:r>
             <a:endParaRPr lang="en-US" dirty="0"/>
           </a:p>
@@ -3632,7 +3635,7 @@
           <a:p>
             <a:r>
               <a:rPr lang="en-US" dirty="0"/>
-              <a:t>The expected answer is: to survive the cold winter. If you got it right, well done.</a:t>
+              <a:t>Copy the point on Black soils (chernozems) on the left, then draw the diagram on the right: a black soil. Give it a title and label it clearly.</a:t>
             </a:r>
             <a:endParaRPr lang="en-US" dirty="0"/>
           </a:p>
@@ -3720,7 +3723,7 @@
           <a:p>
             <a:r>
               <a:rPr lang="en-US" dirty="0"/>
-              <a:t>Now let us check what you have understood. Question 2: Why is the chernozem good for wheat? Answer in your exercise book.</a:t>
+              <a:t>We continue with Soils. On this slide we have Red Mediterranean soils. Write each point on a new line, with the key term first, and explain it in your own words when we revise.</a:t>
             </a:r>
             <a:endParaRPr lang="en-US" dirty="0"/>
           </a:p>
@@ -3808,7 +3811,7 @@
           <a:p>
             <a:r>
               <a:rPr lang="en-US" dirty="0"/>
-              <a:t>The expected answer is: it is black and full of humus, so it is very fertile. If you got it right, well done.</a:t>
+              <a:t>Now let us check what you have understood. Question 1: Why do deciduous trees lose their leaves in autumn? Answer in your exercise book.</a:t>
             </a:r>
             <a:endParaRPr lang="en-US" dirty="0"/>
           </a:p>
@@ -3896,7 +3899,7 @@
           <a:p>
             <a:r>
               <a:rPr lang="en-US" dirty="0"/>
-              <a:t>For those who need more practice, fill in the blanks in your exercise book. The answers are: number 1, deciduous; number 2, needle; number 3, chernozem.</a:t>
+              <a:t>The expected answer is: to survive the cold winter. If you got it right, well done.</a:t>
             </a:r>
             <a:endParaRPr lang="en-US" dirty="0"/>
           </a:p>
@@ -3984,7 +3987,7 @@
           <a:p>
             <a:r>
               <a:rPr lang="en-US" dirty="0"/>
-              <a:t>For your homework: Find the names of three food products imported into Cameroon from temperate countries (for example wheat flour, milk or apples). We shall correct it at the beginning of our next lesson.</a:t>
+              <a:t>Now let us check what you have understood. Question 2: Why is the chernozem good for wheat? Answer in your exercise book.</a:t>
             </a:r>
             <a:endParaRPr lang="en-US" dirty="0"/>
           </a:p>
@@ -4072,7 +4075,7 @@
           <a:p>
             <a:r>
               <a:rPr lang="en-US" dirty="0"/>
-              <a:t>Our next lesson will be on Lesson 4 (Part 3): The Temperate Region: Human Activities (Farming). Thank you for your attention, and see you next time.</a:t>
+              <a:t>The expected answer is: it is black and full of humus, so it is very fertile. If you got it right, well done.</a:t>
             </a:r>
             <a:endParaRPr lang="en-US" dirty="0"/>
           </a:p>
@@ -4160,7 +4163,7 @@
           <a:p>
             <a:r>
               <a:rPr lang="en-US" dirty="0"/>
-              <a:t>Let us play the bilingual game. I say a word in English, and you give me the French word. Then we do the reverse.</a:t>
+              <a:t>For those who need more practice, fill in the blanks in your exercise book. The answers are: number 1, deciduous; number 2, needle; number 3, chernozem.</a:t>
             </a:r>
             <a:endParaRPr lang="en-US" dirty="0"/>
           </a:p>
@@ -4248,7 +4251,7 @@
           <a:p>
             <a:r>
               <a:rPr lang="en-US" dirty="0"/>
-              <a:t>I record this information in the official logbook of the class after the lesson.</a:t>
+              <a:t>For your homework: Find the names of three food products imported into Cameroon from temperate countries (for example wheat flour, milk or apples). We shall correct it at the beginning of our next lesson.</a:t>
             </a:r>
             <a:endParaRPr lang="en-US" dirty="0"/>
           </a:p>
@@ -4336,7 +4339,7 @@
           <a:p>
             <a:r>
               <a:rPr lang="en-US" dirty="0"/>
-              <a:t>I complete the second page of the logbook: the matter taught, the evaluation, the homework and the attendance.</a:t>
+              <a:t>Our next lesson will be on Lesson 4 (Part 3): The Temperate Region: Human Activities (Farming). Thank you for your attention, and see you next time.</a:t>
             </a:r>
             <a:endParaRPr lang="en-US" dirty="0"/>
           </a:p>
@@ -4512,7 +4515,7 @@
           <a:p>
             <a:r>
               <a:rPr lang="en-US" dirty="0"/>
-              <a:t>This slide is for me, the teacher: it gives the timing of the lesson and what to do if the projector is not available.</a:t>
+              <a:t>Let us play the bilingual game. I say a word in English, and you give me the French word. Then we do the reverse.</a:t>
             </a:r>
             <a:endParaRPr lang="en-US" dirty="0"/>
           </a:p>
@@ -4600,7 +4603,7 @@
           <a:p>
             <a:r>
               <a:rPr lang="en-US" dirty="0"/>
-              <a:t>These are the references and picture credits used to prepare this lesson.</a:t>
+              <a:t>I record this information in the official logbook of the class after the lesson.</a:t>
             </a:r>
             <a:endParaRPr lang="en-US" dirty="0"/>
           </a:p>
@@ -4624,6 +4627,270 @@
             <a:fld id="{F7021451-1387-4CA6-816F-3879F97B5CBC}" type="slidenum">
               <a:rPr lang="en-US"/>
               <a:t>51</a:t>
+            </a:fld>
+            <a:endParaRPr lang="en-US"/>
+          </a:p>
+        </p:txBody>
+      </p:sp>
+    </p:spTree>
+    <p:extLst>
+      <p:ext uri="{BB962C8B-B14F-4D97-AF65-F5344CB8AC3E}">
+        <p14:creationId xmlns:p14="http://schemas.microsoft.com/office/powerpoint/2010/main" val="1024086991"/>
+      </p:ext>
+    </p:extLst>
+  </p:cSld>
+  <p:clrMapOvr>
+    <a:masterClrMapping/>
+  </p:clrMapOvr>
+</p:notes>
+</file>
+
+<file path=ppt/notesSlides/notesSlide52.xml><?xml version="1.0" encoding="utf-8"?>
+<p:notes xmlns:a="http://schemas.openxmlformats.org/drawingml/2006/main" xmlns:r="http://schemas.openxmlformats.org/officeDocument/2006/relationships" xmlns:p="http://schemas.openxmlformats.org/presentationml/2006/main">
+  <p:cSld>
+    <p:spTree>
+      <p:nvGrpSpPr>
+        <p:cNvPr id="1" name=""/>
+        <p:cNvGrpSpPr/>
+        <p:nvPr/>
+      </p:nvGrpSpPr>
+      <p:grpSpPr>
+        <a:xfrm>
+          <a:off x="0" y="0"/>
+          <a:ext cx="0" cy="0"/>
+          <a:chOff x="0" y="0"/>
+          <a:chExt cx="0" cy="0"/>
+        </a:xfrm>
+      </p:grpSpPr>
+      <p:sp>
+        <p:nvSpPr>
+          <p:cNvPr id="2" name="Slide Image Placeholder 1"/>
+          <p:cNvSpPr>
+            <a:spLocks noGrp="1" noRot="1" noChangeAspect="1"/>
+          </p:cNvSpPr>
+          <p:nvPr>
+            <p:ph type="sldImg"/>
+          </p:nvPr>
+        </p:nvSpPr>
+        <p:spPr/>
+      </p:sp>
+      <p:sp>
+        <p:nvSpPr>
+          <p:cNvPr id="3" name="Notes Placeholder 2"/>
+          <p:cNvSpPr>
+            <a:spLocks noGrp="1"/>
+          </p:cNvSpPr>
+          <p:nvPr>
+            <p:ph type="body" idx="1"/>
+          </p:nvPr>
+        </p:nvSpPr>
+        <p:spPr/>
+        <p:txBody>
+          <a:bodyPr/>
+          <a:lstStyle/>
+          <a:p>
+            <a:r>
+              <a:rPr lang="en-US" dirty="0"/>
+              <a:t>I complete the second page of the logbook: the matter taught, the evaluation, the homework and the attendance.</a:t>
+            </a:r>
+            <a:endParaRPr lang="en-US" dirty="0"/>
+          </a:p>
+        </p:txBody>
+      </p:sp>
+      <p:sp>
+        <p:nvSpPr>
+          <p:cNvPr id="4" name="Slide Number Placeholder 3"/>
+          <p:cNvSpPr>
+            <a:spLocks noGrp="1"/>
+          </p:cNvSpPr>
+          <p:nvPr>
+            <p:ph type="sldNum" sz="quarter" idx="10"/>
+          </p:nvPr>
+        </p:nvSpPr>
+        <p:spPr/>
+        <p:txBody>
+          <a:bodyPr/>
+          <a:lstStyle/>
+          <a:p>
+            <a:fld id="{F7021451-1387-4CA6-816F-3879F97B5CBC}" type="slidenum">
+              <a:rPr lang="en-US"/>
+              <a:t>52</a:t>
+            </a:fld>
+            <a:endParaRPr lang="en-US"/>
+          </a:p>
+        </p:txBody>
+      </p:sp>
+    </p:spTree>
+    <p:extLst>
+      <p:ext uri="{BB962C8B-B14F-4D97-AF65-F5344CB8AC3E}">
+        <p14:creationId xmlns:p14="http://schemas.microsoft.com/office/powerpoint/2010/main" val="1024086991"/>
+      </p:ext>
+    </p:extLst>
+  </p:cSld>
+  <p:clrMapOvr>
+    <a:masterClrMapping/>
+  </p:clrMapOvr>
+</p:notes>
+</file>
+
+<file path=ppt/notesSlides/notesSlide53.xml><?xml version="1.0" encoding="utf-8"?>
+<p:notes xmlns:a="http://schemas.openxmlformats.org/drawingml/2006/main" xmlns:r="http://schemas.openxmlformats.org/officeDocument/2006/relationships" xmlns:p="http://schemas.openxmlformats.org/presentationml/2006/main">
+  <p:cSld>
+    <p:spTree>
+      <p:nvGrpSpPr>
+        <p:cNvPr id="1" name=""/>
+        <p:cNvGrpSpPr/>
+        <p:nvPr/>
+      </p:nvGrpSpPr>
+      <p:grpSpPr>
+        <a:xfrm>
+          <a:off x="0" y="0"/>
+          <a:ext cx="0" cy="0"/>
+          <a:chOff x="0" y="0"/>
+          <a:chExt cx="0" cy="0"/>
+        </a:xfrm>
+      </p:grpSpPr>
+      <p:sp>
+        <p:nvSpPr>
+          <p:cNvPr id="2" name="Slide Image Placeholder 1"/>
+          <p:cNvSpPr>
+            <a:spLocks noGrp="1" noRot="1" noChangeAspect="1"/>
+          </p:cNvSpPr>
+          <p:nvPr>
+            <p:ph type="sldImg"/>
+          </p:nvPr>
+        </p:nvSpPr>
+        <p:spPr/>
+      </p:sp>
+      <p:sp>
+        <p:nvSpPr>
+          <p:cNvPr id="3" name="Notes Placeholder 2"/>
+          <p:cNvSpPr>
+            <a:spLocks noGrp="1"/>
+          </p:cNvSpPr>
+          <p:nvPr>
+            <p:ph type="body" idx="1"/>
+          </p:nvPr>
+        </p:nvSpPr>
+        <p:spPr/>
+        <p:txBody>
+          <a:bodyPr/>
+          <a:lstStyle/>
+          <a:p>
+            <a:r>
+              <a:rPr lang="en-US" dirty="0"/>
+              <a:t>This slide is for me, the teacher: it gives the timing of the lesson and what to do if the projector is not available.</a:t>
+            </a:r>
+            <a:endParaRPr lang="en-US" dirty="0"/>
+          </a:p>
+        </p:txBody>
+      </p:sp>
+      <p:sp>
+        <p:nvSpPr>
+          <p:cNvPr id="4" name="Slide Number Placeholder 3"/>
+          <p:cNvSpPr>
+            <a:spLocks noGrp="1"/>
+          </p:cNvSpPr>
+          <p:nvPr>
+            <p:ph type="sldNum" sz="quarter" idx="10"/>
+          </p:nvPr>
+        </p:nvSpPr>
+        <p:spPr/>
+        <p:txBody>
+          <a:bodyPr/>
+          <a:lstStyle/>
+          <a:p>
+            <a:fld id="{F7021451-1387-4CA6-816F-3879F97B5CBC}" type="slidenum">
+              <a:rPr lang="en-US"/>
+              <a:t>53</a:t>
+            </a:fld>
+            <a:endParaRPr lang="en-US"/>
+          </a:p>
+        </p:txBody>
+      </p:sp>
+    </p:spTree>
+    <p:extLst>
+      <p:ext uri="{BB962C8B-B14F-4D97-AF65-F5344CB8AC3E}">
+        <p14:creationId xmlns:p14="http://schemas.microsoft.com/office/powerpoint/2010/main" val="1024086991"/>
+      </p:ext>
+    </p:extLst>
+  </p:cSld>
+  <p:clrMapOvr>
+    <a:masterClrMapping/>
+  </p:clrMapOvr>
+</p:notes>
+</file>
+
+<file path=ppt/notesSlides/notesSlide54.xml><?xml version="1.0" encoding="utf-8"?>
+<p:notes xmlns:a="http://schemas.openxmlformats.org/drawingml/2006/main" xmlns:r="http://schemas.openxmlformats.org/officeDocument/2006/relationships" xmlns:p="http://schemas.openxmlformats.org/presentationml/2006/main">
+  <p:cSld>
+    <p:spTree>
+      <p:nvGrpSpPr>
+        <p:cNvPr id="1" name=""/>
+        <p:cNvGrpSpPr/>
+        <p:nvPr/>
+      </p:nvGrpSpPr>
+      <p:grpSpPr>
+        <a:xfrm>
+          <a:off x="0" y="0"/>
+          <a:ext cx="0" cy="0"/>
+          <a:chOff x="0" y="0"/>
+          <a:chExt cx="0" cy="0"/>
+        </a:xfrm>
+      </p:grpSpPr>
+      <p:sp>
+        <p:nvSpPr>
+          <p:cNvPr id="2" name="Slide Image Placeholder 1"/>
+          <p:cNvSpPr>
+            <a:spLocks noGrp="1" noRot="1" noChangeAspect="1"/>
+          </p:cNvSpPr>
+          <p:nvPr>
+            <p:ph type="sldImg"/>
+          </p:nvPr>
+        </p:nvSpPr>
+        <p:spPr/>
+      </p:sp>
+      <p:sp>
+        <p:nvSpPr>
+          <p:cNvPr id="3" name="Notes Placeholder 2"/>
+          <p:cNvSpPr>
+            <a:spLocks noGrp="1"/>
+          </p:cNvSpPr>
+          <p:nvPr>
+            <p:ph type="body" idx="1"/>
+          </p:nvPr>
+        </p:nvSpPr>
+        <p:spPr/>
+        <p:txBody>
+          <a:bodyPr/>
+          <a:lstStyle/>
+          <a:p>
+            <a:r>
+              <a:rPr lang="en-US" dirty="0"/>
+              <a:t>These are the references and picture credits used to prepare this lesson.</a:t>
+            </a:r>
+            <a:endParaRPr lang="en-US" dirty="0"/>
+          </a:p>
+        </p:txBody>
+      </p:sp>
+      <p:sp>
+        <p:nvSpPr>
+          <p:cNvPr id="4" name="Slide Number Placeholder 3"/>
+          <p:cNvSpPr>
+            <a:spLocks noGrp="1"/>
+          </p:cNvSpPr>
+          <p:nvPr>
+            <p:ph type="sldNum" sz="quarter" idx="10"/>
+          </p:nvPr>
+        </p:nvSpPr>
+        <p:spPr/>
+        <p:txBody>
+          <a:bodyPr/>
+          <a:lstStyle/>
+          <a:p>
+            <a:fld id="{F7021451-1387-4CA6-816F-3879F97B5CBC}" type="slidenum">
+              <a:rPr lang="en-US"/>
+              <a:t>54</a:t>
             </a:fld>
             <a:endParaRPr lang="en-US"/>
           </a:p>
@@ -6332,7 +6599,7 @@
         <p:spPr>
           <a:xfrm>
             <a:off x="0" y="658368"/>
-            <a:ext cx="5120640" cy="5833872"/>
+            <a:ext cx="2468880" cy="5833872"/>
           </a:xfrm>
           <a:prstGeom prst="rect">
             <a:avLst/>
@@ -6347,8 +6614,8 @@
         </p:nvSpPr>
         <p:spPr>
           <a:xfrm>
-            <a:off x="5349240" y="1005840"/>
-            <a:ext cx="6522415" cy="731520"/>
+            <a:off x="2697480" y="1005840"/>
+            <a:ext cx="9174175" cy="731520"/>
           </a:xfrm>
           <a:prstGeom prst="rect">
             <a:avLst/>
@@ -6388,8 +6655,8 @@
         </p:nvSpPr>
         <p:spPr>
           <a:xfrm>
-            <a:off x="5349240" y="1783080"/>
-            <a:ext cx="6522415" cy="4663440"/>
+            <a:off x="2697480" y="1783080"/>
+            <a:ext cx="9174175" cy="4663440"/>
           </a:xfrm>
           <a:prstGeom prst="rect">
             <a:avLst/>
@@ -6416,7 +6683,7 @@
                 <a:ea typeface="Times New Roman" pitchFamily="34" charset="-122"/>
                 <a:cs typeface="Times New Roman" pitchFamily="34" charset="-120"/>
               </a:rPr>
-              <a:t>On a trip to Europe in November, Samuel sees a forest with yellow and red leaves. Many leaves fall to the ground. In January, the trees have no leaves at all.</a:t>
+              <a:t>On a trip to Europe in November, Samuel sees a forest with yellow and red leaves falling to the ground. In January, the trees have no leaves at all, but some pine trees are still green. Samuel asks: "Why do some trees lose their leaves in winter and others do not?"</a:t>
             </a:r>
             <a:endParaRPr lang="en-US" sz="4000" dirty="0"/>
           </a:p>
@@ -6854,7 +7121,7 @@
                 <a:ea typeface="Times New Roman" pitchFamily="34" charset="-122"/>
                 <a:cs typeface="Times New Roman" pitchFamily="34" charset="-120"/>
               </a:rPr>
-              <a:t>Samuel does not know why the trees lose their leaves.</a:t>
+              <a:t>Samuel does not know how temperate plants are adapted to winter.</a:t>
             </a:r>
             <a:endParaRPr lang="en-US" sz="4000" dirty="0"/>
           </a:p>
@@ -7073,7 +7340,7 @@
                 <a:ea typeface="Times New Roman" pitchFamily="34" charset="-122"/>
                 <a:cs typeface="Times New Roman" pitchFamily="34" charset="-120"/>
               </a:rPr>
-              <a:t>What did he see in November and in January?</a:t>
+              <a:t>What colour are the leaves in November?</a:t>
             </a:r>
             <a:endParaRPr lang="en-US" sz="4000" dirty="0"/>
           </a:p>
@@ -7292,7 +7559,7 @@
                 <a:ea typeface="Times New Roman" pitchFamily="34" charset="-122"/>
                 <a:cs typeface="Times New Roman" pitchFamily="34" charset="-120"/>
               </a:rPr>
-              <a:t>Yellow and red leaves in November; no leaves in January.</a:t>
+              <a:t>Yellow and red.</a:t>
             </a:r>
             <a:endParaRPr lang="en-US" sz="4000" dirty="0"/>
           </a:p>
@@ -7511,7 +7778,7 @@
                 <a:ea typeface="Times New Roman" pitchFamily="34" charset="-122"/>
                 <a:cs typeface="Times New Roman" pitchFamily="34" charset="-120"/>
               </a:rPr>
-              <a:t>What happens to the fallen leaves?</a:t>
+              <a:t>Which trees are still green in January?</a:t>
             </a:r>
             <a:endParaRPr lang="en-US" sz="4000" dirty="0"/>
           </a:p>
@@ -7730,7 +7997,7 @@
                 <a:ea typeface="Times New Roman" pitchFamily="34" charset="-122"/>
                 <a:cs typeface="Times New Roman" pitchFamily="34" charset="-120"/>
               </a:rPr>
-              <a:t>They rot and make the soil rich.</a:t>
+              <a:t>Pine trees (conifers).</a:t>
             </a:r>
             <a:endParaRPr lang="en-US" sz="4000" dirty="0"/>
           </a:p>
@@ -9629,7 +9896,7 @@
                 <a:ea typeface="Times New Roman" pitchFamily="34" charset="-122"/>
                 <a:cs typeface="Times New Roman" pitchFamily="34" charset="-120"/>
               </a:rPr>
-              <a:t>A forest of pine trees in winter.</a:t>
+              <a:t>Conifers with needle leaves.</a:t>
             </a:r>
             <a:endParaRPr lang="en-US" sz="1800" dirty="0"/>
           </a:p>
@@ -9848,7 +10115,7 @@
                 <a:ea typeface="Times New Roman" pitchFamily="34" charset="-122"/>
                 <a:cs typeface="Times New Roman" pitchFamily="34" charset="-120"/>
               </a:rPr>
-              <a:t>These trees keep their thin, needle leaves in winter. How do the leaves help them?</a:t>
+              <a:t>How do needle leaves help conifers in winter?</a:t>
             </a:r>
             <a:endParaRPr lang="en-US" sz="4000" dirty="0"/>
           </a:p>
@@ -10067,7 +10334,7 @@
                 <a:ea typeface="Times New Roman" pitchFamily="34" charset="-122"/>
                 <a:cs typeface="Times New Roman" pitchFamily="34" charset="-120"/>
               </a:rPr>
-              <a:t>Needle leaves lose little water and the snow slides off.</a:t>
+              <a:t>They lose little water, and the snow slides off.</a:t>
             </a:r>
             <a:endParaRPr lang="en-US" sz="4000" dirty="0"/>
           </a:p>
@@ -10500,7 +10767,7 @@
                 <a:ea typeface="Times New Roman" pitchFamily="34" charset="-122"/>
                 <a:cs typeface="Times New Roman" pitchFamily="34" charset="-120"/>
               </a:rPr>
-              <a:t>The olive tree has small, hard leaves. How does this help it in the dry summer?</a:t>
+              <a:t>How do small, hard leaves help the olive tree in the dry summer?</a:t>
             </a:r>
             <a:endParaRPr lang="en-US" sz="4000" dirty="0"/>
           </a:p>
@@ -10719,7 +10986,7 @@
                 <a:ea typeface="Times New Roman" pitchFamily="34" charset="-122"/>
                 <a:cs typeface="Times New Roman" pitchFamily="34" charset="-120"/>
               </a:rPr>
-              <a:t>Small, hard leaves lose little water.</a:t>
+              <a:t>They lose little water.</a:t>
             </a:r>
             <a:endParaRPr lang="en-US" sz="4000" dirty="0"/>
           </a:p>
@@ -10933,7 +11200,7 @@
                 <a:ea typeface="Times New Roman" pitchFamily="34" charset="-122"/>
                 <a:cs typeface="Times New Roman" pitchFamily="34" charset="-120"/>
               </a:rPr>
-              <a:t>A grassland in North America.</a:t>
+              <a:t>A grassland.</a:t>
             </a:r>
             <a:endParaRPr lang="en-US" sz="1800" dirty="0"/>
           </a:p>
@@ -11152,7 +11419,7 @@
                 <a:ea typeface="Times New Roman" pitchFamily="34" charset="-122"/>
                 <a:cs typeface="Times New Roman" pitchFamily="34" charset="-120"/>
               </a:rPr>
-              <a:t>There are almost no trees here, only grass. Why?</a:t>
+              <a:t>Why are there almost no trees here?</a:t>
             </a:r>
             <a:endParaRPr lang="en-US" sz="4000" dirty="0"/>
           </a:p>
@@ -12594,7 +12861,7 @@
                 <a:ea typeface="Times New Roman" pitchFamily="34" charset="-122"/>
                 <a:cs typeface="Times New Roman" pitchFamily="34" charset="-120"/>
               </a:rPr>
-              <a:t>A dark, rich soil.</a:t>
+              <a:t>A black soil.</a:t>
             </a:r>
             <a:endParaRPr lang="en-US" sz="1800" dirty="0"/>
           </a:p>
@@ -12813,7 +13080,7 @@
                 <a:ea typeface="Times New Roman" pitchFamily="34" charset="-122"/>
                 <a:cs typeface="Times New Roman" pitchFamily="34" charset="-120"/>
               </a:rPr>
-              <a:t>This black soil is found under grasslands. Why is it good for wheat?</a:t>
+              <a:t>Why is this black soil good for wheat?</a:t>
             </a:r>
             <a:endParaRPr lang="en-US" sz="4000" dirty="0"/>
           </a:p>
@@ -13243,7 +13510,7 @@
               <a:buNone/>
             </a:pPr>
             <a:r>
-              <a:rPr lang="en-US" sz="4000" b="1" dirty="0">
+              <a:rPr lang="en-US" sz="3200" b="1" dirty="0">
                 <a:solidFill>
                   <a:srgbClr val="111111"/>
                 </a:solidFill>
@@ -13253,7 +13520,7 @@
               </a:rPr>
               <a:t>Topic: Man in His Environment</a:t>
             </a:r>
-            <a:endParaRPr lang="en-US" sz="4000" dirty="0"/>
+            <a:endParaRPr lang="en-US" sz="3200" dirty="0"/>
           </a:p>
           <a:p>
             <a:pPr algn="l" indent="0" marL="0">
@@ -13263,7 +13530,7 @@
               <a:buNone/>
             </a:pPr>
             <a:r>
-              <a:rPr lang="en-US" sz="4000" b="1" dirty="0">
+              <a:rPr lang="en-US" sz="3200" b="1" dirty="0">
                 <a:solidFill>
                   <a:srgbClr val="111111"/>
                 </a:solidFill>
@@ -13273,7 +13540,7 @@
               </a:rPr>
               <a:t>Sub-topic: Natural Regions</a:t>
             </a:r>
-            <a:endParaRPr lang="en-US" sz="4000" dirty="0"/>
+            <a:endParaRPr lang="en-US" sz="3200" dirty="0"/>
           </a:p>
           <a:p>
             <a:pPr algn="l" indent="0" marL="0">
@@ -13283,7 +13550,7 @@
               <a:buNone/>
             </a:pPr>
             <a:r>
-              <a:rPr lang="en-US" sz="4000" b="1" dirty="0">
+              <a:rPr lang="en-US" sz="3200" b="1" dirty="0">
                 <a:solidFill>
                   <a:srgbClr val="990011"/>
                 </a:solidFill>
@@ -13293,7 +13560,7 @@
               </a:rPr>
               <a:t>Lesson 4 (Part 2): The Temperate Region: Characteristics (Soils and Vegetation)</a:t>
             </a:r>
-            <a:endParaRPr lang="en-US" sz="4000" dirty="0"/>
+            <a:endParaRPr lang="en-US" sz="3200" dirty="0"/>
           </a:p>
         </p:txBody>
       </p:sp>
@@ -13426,7 +13693,7 @@
         <p:spPr>
           <a:xfrm>
             <a:off x="0" y="658368"/>
-            <a:ext cx="2468880" cy="5833872"/>
+            <a:ext cx="5120640" cy="5833872"/>
           </a:xfrm>
           <a:prstGeom prst="rect">
             <a:avLst/>
@@ -13441,8 +13708,8 @@
         </p:nvSpPr>
         <p:spPr>
           <a:xfrm>
-            <a:off x="2697480" y="1005840"/>
-            <a:ext cx="9174175" cy="731520"/>
+            <a:off x="5349240" y="1005840"/>
+            <a:ext cx="6522415" cy="731520"/>
           </a:xfrm>
           <a:prstGeom prst="rect">
             <a:avLst/>
@@ -13482,8 +13749,8 @@
         </p:nvSpPr>
         <p:spPr>
           <a:xfrm>
-            <a:off x="2697480" y="1783080"/>
-            <a:ext cx="9174175" cy="4663440"/>
+            <a:off x="5349240" y="1783080"/>
+            <a:ext cx="6522415" cy="4663440"/>
           </a:xfrm>
           <a:prstGeom prst="rect">
             <a:avLst/>
@@ -13515,11 +13782,12 @@
             <a:endParaRPr lang="en-US" sz="4000" dirty="0"/>
           </a:p>
           <a:p>
-            <a:pPr algn="l" indent="0" marL="0">
+            <a:pPr algn="l" marL="342900" indent="-342900">
               <a:spcAft>
                 <a:spcPts val="800"/>
               </a:spcAft>
-              <a:buNone/>
+              <a:buSzPct val="100000"/>
+              <a:buChar char="•"/>
             </a:pPr>
             <a:r>
               <a:rPr lang="en-US" sz="4000" b="1" dirty="0">
@@ -13530,13 +13798,14 @@
                 <a:ea typeface="Times New Roman" pitchFamily="34" charset="-122"/>
                 <a:cs typeface="Times New Roman" pitchFamily="34" charset="-120"/>
               </a:rPr>
-              <a:t>Deciduous forest: </a:t>
-            </a:r>
-            <a:pPr algn="l" indent="0" marL="0">
+              <a:t>Deciduous tree: </a:t>
+            </a:r>
+            <a:pPr algn="l" marL="342900" indent="-342900">
               <a:spcAft>
                 <a:spcPts val="800"/>
               </a:spcAft>
-              <a:buNone/>
+              <a:buSzPct val="100000"/>
+              <a:buChar char="•"/>
             </a:pPr>
             <a:r>
               <a:rPr lang="en-US" sz="4000" dirty="0">
@@ -13547,16 +13816,17 @@
                 <a:ea typeface="Times New Roman" pitchFamily="34" charset="-122"/>
                 <a:cs typeface="Times New Roman" pitchFamily="34" charset="-120"/>
               </a:rPr>
-              <a:t>It is a forest whose trees lose their leaves in autumn.</a:t>
+              <a:t>It is a tree that loses its leaves in one season.</a:t>
             </a:r>
             <a:endParaRPr lang="en-US" sz="4000" dirty="0"/>
           </a:p>
           <a:p>
-            <a:pPr algn="l" indent="0" marL="0">
+            <a:pPr algn="l" marL="342900" indent="-342900">
               <a:spcAft>
                 <a:spcPts val="800"/>
               </a:spcAft>
-              <a:buNone/>
+              <a:buSzPct val="100000"/>
+              <a:buChar char="•"/>
             </a:pPr>
             <a:r>
               <a:rPr lang="en-US" sz="4000" b="1" dirty="0">
@@ -13567,13 +13837,14 @@
                 <a:ea typeface="Times New Roman" pitchFamily="34" charset="-122"/>
                 <a:cs typeface="Times New Roman" pitchFamily="34" charset="-120"/>
               </a:rPr>
-              <a:t>Coniferous forest: </a:t>
-            </a:r>
-            <a:pPr algn="l" indent="0" marL="0">
+              <a:t>Conifer: </a:t>
+            </a:r>
+            <a:pPr algn="l" marL="342900" indent="-342900">
               <a:spcAft>
                 <a:spcPts val="800"/>
               </a:spcAft>
-              <a:buNone/>
+              <a:buSzPct val="100000"/>
+              <a:buChar char="•"/>
             </a:pPr>
             <a:r>
               <a:rPr lang="en-US" sz="4000" dirty="0">
@@ -13584,7 +13855,7 @@
                 <a:ea typeface="Times New Roman" pitchFamily="34" charset="-122"/>
                 <a:cs typeface="Times New Roman" pitchFamily="34" charset="-120"/>
               </a:rPr>
-              <a:t>It is a forest of trees with needle-shaped leaves and cones.</a:t>
+              <a:t>It is a tree with needle leaves and cones.</a:t>
             </a:r>
             <a:endParaRPr lang="en-US" sz="4000" dirty="0"/>
           </a:p>
@@ -13702,9 +13973,131 @@
           </a:p>
         </p:txBody>
       </p:sp>
+      <p:sp>
+        <p:nvSpPr>
+          <p:cNvPr id="3" name="Text 1"/>
+          <p:cNvSpPr/>
+          <p:nvPr/>
+        </p:nvSpPr>
+        <p:spPr>
+          <a:xfrm>
+            <a:off x="365760" y="1005840"/>
+            <a:ext cx="11460175" cy="731520"/>
+          </a:xfrm>
+          <a:prstGeom prst="rect">
+            <a:avLst/>
+          </a:prstGeom>
+          <a:noFill/>
+          <a:ln/>
+        </p:spPr>
+        <p:txBody>
+          <a:bodyPr wrap="square" lIns="0" tIns="0" rIns="0" bIns="0" rtlCol="0" anchor="ctr">
+            <a:normAutofit/>
+          </a:bodyPr>
+          <a:lstStyle/>
+          <a:p>
+            <a:pPr algn="ctr" indent="0" marL="0">
+              <a:buNone/>
+            </a:pPr>
+            <a:r>
+              <a:rPr lang="en-US" sz="3600" b="1" dirty="0">
+                <a:solidFill>
+                  <a:srgbClr val="990011"/>
+                </a:solidFill>
+                <a:latin typeface="Times New Roman" pitchFamily="34" charset="0"/>
+                <a:ea typeface="Times New Roman" pitchFamily="34" charset="-122"/>
+                <a:cs typeface="Times New Roman" pitchFamily="34" charset="-120"/>
+              </a:rPr>
+              <a:t>1. Vegetation</a:t>
+            </a:r>
+            <a:endParaRPr lang="en-US" sz="3600" dirty="0"/>
+          </a:p>
+        </p:txBody>
+      </p:sp>
+      <p:sp>
+        <p:nvSpPr>
+          <p:cNvPr id="4" name="Text 2"/>
+          <p:cNvSpPr/>
+          <p:nvPr/>
+        </p:nvSpPr>
+        <p:spPr>
+          <a:xfrm>
+            <a:off x="365760" y="1783080"/>
+            <a:ext cx="4846320" cy="4617720"/>
+          </a:xfrm>
+          <a:prstGeom prst="rect">
+            <a:avLst/>
+          </a:prstGeom>
+          <a:noFill/>
+          <a:ln/>
+        </p:spPr>
+        <p:txBody>
+          <a:bodyPr wrap="square" lIns="0" tIns="0" rIns="0" bIns="0" rtlCol="0" anchor="t"/>
+          <a:lstStyle/>
+          <a:p>
+            <a:pPr algn="l" indent="0" marL="0">
+              <a:spcAft>
+                <a:spcPts val="800"/>
+              </a:spcAft>
+              <a:buNone/>
+            </a:pPr>
+            <a:r>
+              <a:rPr lang="en-US" sz="3600" i="1" dirty="0">
+                <a:solidFill>
+                  <a:srgbClr val="111111"/>
+                </a:solidFill>
+                <a:latin typeface="Times New Roman" pitchFamily="34" charset="0"/>
+                <a:ea typeface="Times New Roman" pitchFamily="34" charset="-122"/>
+                <a:cs typeface="Times New Roman" pitchFamily="34" charset="-120"/>
+              </a:rPr>
+              <a:t>The temperate region has the following vegetation:</a:t>
+            </a:r>
+            <a:endParaRPr lang="en-US" sz="3600" dirty="0"/>
+          </a:p>
+          <a:p>
+            <a:pPr algn="l" marL="342900" indent="-342900">
+              <a:spcAft>
+                <a:spcPts val="800"/>
+              </a:spcAft>
+              <a:buSzPct val="100000"/>
+              <a:buChar char="•"/>
+            </a:pPr>
+            <a:r>
+              <a:rPr lang="en-US" sz="3600" b="1" dirty="0">
+                <a:solidFill>
+                  <a:srgbClr val="111111"/>
+                </a:solidFill>
+                <a:latin typeface="Times New Roman" pitchFamily="34" charset="0"/>
+                <a:ea typeface="Times New Roman" pitchFamily="34" charset="-122"/>
+                <a:cs typeface="Times New Roman" pitchFamily="34" charset="-120"/>
+              </a:rPr>
+              <a:t>Deciduous forests: </a:t>
+            </a:r>
+            <a:pPr algn="l" marL="342900" indent="-342900">
+              <a:spcAft>
+                <a:spcPts val="800"/>
+              </a:spcAft>
+              <a:buSzPct val="100000"/>
+              <a:buChar char="•"/>
+            </a:pPr>
+            <a:r>
+              <a:rPr lang="en-US" sz="3600" dirty="0">
+                <a:solidFill>
+                  <a:srgbClr val="111111"/>
+                </a:solidFill>
+                <a:latin typeface="Times New Roman" pitchFamily="34" charset="0"/>
+                <a:ea typeface="Times New Roman" pitchFamily="34" charset="-122"/>
+                <a:cs typeface="Times New Roman" pitchFamily="34" charset="-120"/>
+              </a:rPr>
+              <a:t>Oak and beech lose their leaves in autumn.</a:t>
+            </a:r>
+            <a:endParaRPr lang="en-US" sz="3600" dirty="0"/>
+          </a:p>
+        </p:txBody>
+      </p:sp>
       <p:pic>
         <p:nvPicPr>
-          <p:cNvPr id="3" name="Image 0" descr="/home/claude/f4/img/minesec_sheet.png">    </p:cNvPr>
+          <p:cNvPr id="5" name="Image 0" descr="/home/claude/f4/img/v2/f2t_autumn_forest.jpg">    </p:cNvPr>
           <p:cNvPicPr>
             <a:picLocks noChangeAspect="1"/>
           </p:cNvPicPr>
@@ -13718,8 +14111,8 @@
         </p:blipFill>
         <p:spPr>
           <a:xfrm>
-            <a:off x="0" y="658368"/>
-            <a:ext cx="1463040" cy="5833872"/>
+            <a:off x="5349240" y="2071212"/>
+            <a:ext cx="6659575" cy="3693983"/>
           </a:xfrm>
           <a:prstGeom prst="rect">
             <a:avLst/>
@@ -13728,14 +14121,14 @@
       </p:pic>
       <p:sp>
         <p:nvSpPr>
-          <p:cNvPr id="4" name="Text 1"/>
+          <p:cNvPr id="6" name="Text 3"/>
           <p:cNvSpPr/>
           <p:nvPr/>
         </p:nvSpPr>
         <p:spPr>
           <a:xfrm>
-            <a:off x="1691640" y="1005840"/>
-            <a:ext cx="10180015" cy="731520"/>
+            <a:off x="5349240" y="6089904"/>
+            <a:ext cx="6659575" cy="347472"/>
           </a:xfrm>
           <a:prstGeom prst="rect">
             <a:avLst/>
@@ -13744,142 +14137,24 @@
           <a:ln/>
         </p:spPr>
         <p:txBody>
-          <a:bodyPr wrap="square" lIns="0" tIns="0" rIns="0" bIns="0" rtlCol="0" anchor="ctr">
-            <a:normAutofit/>
-          </a:bodyPr>
+          <a:bodyPr wrap="square" lIns="0" tIns="0" rIns="0" bIns="0" rtlCol="0" anchor="ctr"/>
           <a:lstStyle/>
           <a:p>
             <a:pPr algn="ctr" indent="0" marL="0">
               <a:buNone/>
             </a:pPr>
             <a:r>
-              <a:rPr lang="en-US" sz="3600" b="1" dirty="0">
-                <a:solidFill>
-                  <a:srgbClr val="990011"/>
+              <a:rPr lang="en-US" sz="1600" i="1" dirty="0">
+                <a:solidFill>
+                  <a:srgbClr val="555555"/>
                 </a:solidFill>
                 <a:latin typeface="Times New Roman" pitchFamily="34" charset="0"/>
                 <a:ea typeface="Times New Roman" pitchFamily="34" charset="-122"/>
                 <a:cs typeface="Times New Roman" pitchFamily="34" charset="-120"/>
               </a:rPr>
-              <a:t>1. Vegetation</a:t>
-            </a:r>
-            <a:endParaRPr lang="en-US" sz="3600" dirty="0"/>
-          </a:p>
-        </p:txBody>
-      </p:sp>
-      <p:sp>
-        <p:nvSpPr>
-          <p:cNvPr id="5" name="Text 2"/>
-          <p:cNvSpPr/>
-          <p:nvPr/>
-        </p:nvSpPr>
-        <p:spPr>
-          <a:xfrm>
-            <a:off x="1691640" y="1783080"/>
-            <a:ext cx="10180015" cy="4663440"/>
-          </a:xfrm>
-          <a:prstGeom prst="rect">
-            <a:avLst/>
-          </a:prstGeom>
-          <a:noFill/>
-          <a:ln/>
-        </p:spPr>
-        <p:txBody>
-          <a:bodyPr wrap="square" lIns="0" tIns="0" rIns="0" bIns="0" rtlCol="0" anchor="t"/>
-          <a:lstStyle/>
-          <a:p>
-            <a:pPr algn="l" indent="0" marL="0">
-              <a:spcAft>
-                <a:spcPts val="800"/>
-              </a:spcAft>
-              <a:buNone/>
-            </a:pPr>
-            <a:r>
-              <a:rPr lang="en-US" sz="4000" i="1" dirty="0">
-                <a:solidFill>
-                  <a:srgbClr val="111111"/>
-                </a:solidFill>
-                <a:latin typeface="Times New Roman" pitchFamily="34" charset="0"/>
-                <a:ea typeface="Times New Roman" pitchFamily="34" charset="-122"/>
-                <a:cs typeface="Times New Roman" pitchFamily="34" charset="-120"/>
-              </a:rPr>
-              <a:t>The temperate region has the following types of vegetation:</a:t>
-            </a:r>
-            <a:endParaRPr lang="en-US" sz="4000" dirty="0"/>
-          </a:p>
-          <a:p>
-            <a:pPr algn="l" indent="0" marL="0">
-              <a:spcAft>
-                <a:spcPts val="800"/>
-              </a:spcAft>
-              <a:buNone/>
-            </a:pPr>
-            <a:r>
-              <a:rPr lang="en-US" sz="4000" b="1" dirty="0">
-                <a:solidFill>
-                  <a:srgbClr val="111111"/>
-                </a:solidFill>
-                <a:latin typeface="Times New Roman" pitchFamily="34" charset="0"/>
-                <a:ea typeface="Times New Roman" pitchFamily="34" charset="-122"/>
-                <a:cs typeface="Times New Roman" pitchFamily="34" charset="-120"/>
-              </a:rPr>
-              <a:t>Deciduous forest: </a:t>
-            </a:r>
-            <a:pPr algn="l" indent="0" marL="0">
-              <a:spcAft>
-                <a:spcPts val="800"/>
-              </a:spcAft>
-              <a:buNone/>
-            </a:pPr>
-            <a:r>
-              <a:rPr lang="en-US" sz="4000" dirty="0">
-                <a:solidFill>
-                  <a:srgbClr val="111111"/>
-                </a:solidFill>
-                <a:latin typeface="Times New Roman" pitchFamily="34" charset="0"/>
-                <a:ea typeface="Times New Roman" pitchFamily="34" charset="-122"/>
-                <a:cs typeface="Times New Roman" pitchFamily="34" charset="-120"/>
-              </a:rPr>
-              <a:t>Trees such as oak and beech lose their leaves in autumn to survive winter.</a:t>
-            </a:r>
-            <a:endParaRPr lang="en-US" sz="4000" dirty="0"/>
-          </a:p>
-          <a:p>
-            <a:pPr algn="l" indent="0" marL="0">
-              <a:spcAft>
-                <a:spcPts val="800"/>
-              </a:spcAft>
-              <a:buNone/>
-            </a:pPr>
-            <a:r>
-              <a:rPr lang="en-US" sz="4000" b="1" dirty="0">
-                <a:solidFill>
-                  <a:srgbClr val="111111"/>
-                </a:solidFill>
-                <a:latin typeface="Times New Roman" pitchFamily="34" charset="0"/>
-                <a:ea typeface="Times New Roman" pitchFamily="34" charset="-122"/>
-                <a:cs typeface="Times New Roman" pitchFamily="34" charset="-120"/>
-              </a:rPr>
-              <a:t>Coniferous forest: </a:t>
-            </a:r>
-            <a:pPr algn="l" indent="0" marL="0">
-              <a:spcAft>
-                <a:spcPts val="800"/>
-              </a:spcAft>
-              <a:buNone/>
-            </a:pPr>
-            <a:r>
-              <a:rPr lang="en-US" sz="4000" dirty="0">
-                <a:solidFill>
-                  <a:srgbClr val="111111"/>
-                </a:solidFill>
-                <a:latin typeface="Times New Roman" pitchFamily="34" charset="0"/>
-                <a:ea typeface="Times New Roman" pitchFamily="34" charset="-122"/>
-                <a:cs typeface="Times New Roman" pitchFamily="34" charset="-120"/>
-              </a:rPr>
-              <a:t>Trees such as pine keep their needles all year in cold areas.</a:t>
-            </a:r>
-            <a:endParaRPr lang="en-US" sz="4000" dirty="0"/>
+              <a:t>Illustration: a forest in autumn</a:t>
+            </a:r>
+            <a:endParaRPr lang="en-US" sz="1600" dirty="0"/>
           </a:p>
         </p:txBody>
       </p:sp>
@@ -13995,9 +14270,111 @@
           </a:p>
         </p:txBody>
       </p:sp>
+      <p:sp>
+        <p:nvSpPr>
+          <p:cNvPr id="3" name="Text 1"/>
+          <p:cNvSpPr/>
+          <p:nvPr/>
+        </p:nvSpPr>
+        <p:spPr>
+          <a:xfrm>
+            <a:off x="365760" y="1005840"/>
+            <a:ext cx="11460175" cy="731520"/>
+          </a:xfrm>
+          <a:prstGeom prst="rect">
+            <a:avLst/>
+          </a:prstGeom>
+          <a:noFill/>
+          <a:ln/>
+        </p:spPr>
+        <p:txBody>
+          <a:bodyPr wrap="square" lIns="0" tIns="0" rIns="0" bIns="0" rtlCol="0" anchor="ctr">
+            <a:normAutofit/>
+          </a:bodyPr>
+          <a:lstStyle/>
+          <a:p>
+            <a:pPr algn="ctr" indent="0" marL="0">
+              <a:buNone/>
+            </a:pPr>
+            <a:r>
+              <a:rPr lang="en-US" sz="3600" b="1" dirty="0">
+                <a:solidFill>
+                  <a:srgbClr val="990011"/>
+                </a:solidFill>
+                <a:latin typeface="Times New Roman" pitchFamily="34" charset="0"/>
+                <a:ea typeface="Times New Roman" pitchFamily="34" charset="-122"/>
+                <a:cs typeface="Times New Roman" pitchFamily="34" charset="-120"/>
+              </a:rPr>
+              <a:t>1. Vegetation</a:t>
+            </a:r>
+            <a:endParaRPr lang="en-US" sz="3600" dirty="0"/>
+          </a:p>
+        </p:txBody>
+      </p:sp>
+      <p:sp>
+        <p:nvSpPr>
+          <p:cNvPr id="4" name="Text 2"/>
+          <p:cNvSpPr/>
+          <p:nvPr/>
+        </p:nvSpPr>
+        <p:spPr>
+          <a:xfrm>
+            <a:off x="365760" y="1783080"/>
+            <a:ext cx="4846320" cy="4617720"/>
+          </a:xfrm>
+          <a:prstGeom prst="rect">
+            <a:avLst/>
+          </a:prstGeom>
+          <a:noFill/>
+          <a:ln/>
+        </p:spPr>
+        <p:txBody>
+          <a:bodyPr wrap="square" lIns="0" tIns="0" rIns="0" bIns="0" rtlCol="0" anchor="t"/>
+          <a:lstStyle/>
+          <a:p>
+            <a:pPr algn="l" marL="342900" indent="-342900">
+              <a:spcAft>
+                <a:spcPts val="800"/>
+              </a:spcAft>
+              <a:buSzPct val="100000"/>
+              <a:buChar char="•"/>
+            </a:pPr>
+            <a:r>
+              <a:rPr lang="en-US" sz="3600" b="1" dirty="0">
+                <a:solidFill>
+                  <a:srgbClr val="111111"/>
+                </a:solidFill>
+                <a:latin typeface="Times New Roman" pitchFamily="34" charset="0"/>
+                <a:ea typeface="Times New Roman" pitchFamily="34" charset="-122"/>
+                <a:cs typeface="Times New Roman" pitchFamily="34" charset="-120"/>
+              </a:rPr>
+              <a:t>Coniferous forests: </a:t>
+            </a:r>
+            <a:pPr algn="l" marL="342900" indent="-342900">
+              <a:spcAft>
+                <a:spcPts val="800"/>
+              </a:spcAft>
+              <a:buSzPct val="100000"/>
+              <a:buChar char="•"/>
+            </a:pPr>
+            <a:r>
+              <a:rPr lang="en-US" sz="3600" dirty="0">
+                <a:solidFill>
+                  <a:srgbClr val="111111"/>
+                </a:solidFill>
+                <a:latin typeface="Times New Roman" pitchFamily="34" charset="0"/>
+                <a:ea typeface="Times New Roman" pitchFamily="34" charset="-122"/>
+                <a:cs typeface="Times New Roman" pitchFamily="34" charset="-120"/>
+              </a:rPr>
+              <a:t>Pine and fir keep their needle leaves.</a:t>
+            </a:r>
+            <a:endParaRPr lang="en-US" sz="3600" dirty="0"/>
+          </a:p>
+        </p:txBody>
+      </p:sp>
       <p:pic>
         <p:nvPicPr>
-          <p:cNvPr id="3" name="Image 0" descr="/home/claude/f4/img/minesec_sheet.png">    </p:cNvPr>
+          <p:cNvPr id="5" name="Image 0" descr="/home/claude/f4/img/v2/f2t_conifer.jpg">    </p:cNvPr>
           <p:cNvPicPr>
             <a:picLocks noChangeAspect="1"/>
           </p:cNvPicPr>
@@ -14011,8 +14388,8 @@
         </p:blipFill>
         <p:spPr>
           <a:xfrm>
-            <a:off x="0" y="658368"/>
-            <a:ext cx="3840480" cy="5833872"/>
+            <a:off x="5349240" y="2071212"/>
+            <a:ext cx="6659575" cy="3693983"/>
           </a:xfrm>
           <a:prstGeom prst="rect">
             <a:avLst/>
@@ -14021,14 +14398,14 @@
       </p:pic>
       <p:sp>
         <p:nvSpPr>
-          <p:cNvPr id="4" name="Text 1"/>
+          <p:cNvPr id="6" name="Text 3"/>
           <p:cNvSpPr/>
           <p:nvPr/>
         </p:nvSpPr>
         <p:spPr>
           <a:xfrm>
-            <a:off x="4069080" y="1005840"/>
-            <a:ext cx="7802575" cy="731520"/>
+            <a:off x="5349240" y="6089904"/>
+            <a:ext cx="6659575" cy="347472"/>
           </a:xfrm>
           <a:prstGeom prst="rect">
             <a:avLst/>
@@ -14037,122 +14414,24 @@
           <a:ln/>
         </p:spPr>
         <p:txBody>
-          <a:bodyPr wrap="square" lIns="0" tIns="0" rIns="0" bIns="0" rtlCol="0" anchor="ctr">
-            <a:normAutofit/>
-          </a:bodyPr>
+          <a:bodyPr wrap="square" lIns="0" tIns="0" rIns="0" bIns="0" rtlCol="0" anchor="ctr"/>
           <a:lstStyle/>
           <a:p>
             <a:pPr algn="ctr" indent="0" marL="0">
               <a:buNone/>
             </a:pPr>
             <a:r>
-              <a:rPr lang="en-US" sz="3600" b="1" dirty="0">
-                <a:solidFill>
-                  <a:srgbClr val="990011"/>
+              <a:rPr lang="en-US" sz="1600" i="1" dirty="0">
+                <a:solidFill>
+                  <a:srgbClr val="555555"/>
                 </a:solidFill>
                 <a:latin typeface="Times New Roman" pitchFamily="34" charset="0"/>
                 <a:ea typeface="Times New Roman" pitchFamily="34" charset="-122"/>
                 <a:cs typeface="Times New Roman" pitchFamily="34" charset="-120"/>
               </a:rPr>
-              <a:t>1. Vegetation (continued)</a:t>
-            </a:r>
-            <a:endParaRPr lang="en-US" sz="3600" dirty="0"/>
-          </a:p>
-        </p:txBody>
-      </p:sp>
-      <p:sp>
-        <p:nvSpPr>
-          <p:cNvPr id="5" name="Text 2"/>
-          <p:cNvSpPr/>
-          <p:nvPr/>
-        </p:nvSpPr>
-        <p:spPr>
-          <a:xfrm>
-            <a:off x="4069080" y="1783080"/>
-            <a:ext cx="7802575" cy="4663440"/>
-          </a:xfrm>
-          <a:prstGeom prst="rect">
-            <a:avLst/>
-          </a:prstGeom>
-          <a:noFill/>
-          <a:ln/>
-        </p:spPr>
-        <p:txBody>
-          <a:bodyPr wrap="square" lIns="0" tIns="0" rIns="0" bIns="0" rtlCol="0" anchor="t"/>
-          <a:lstStyle/>
-          <a:p>
-            <a:pPr algn="l" indent="0" marL="0">
-              <a:spcAft>
-                <a:spcPts val="800"/>
-              </a:spcAft>
-              <a:buNone/>
-            </a:pPr>
-            <a:r>
-              <a:rPr lang="en-US" sz="4000" b="1" dirty="0">
-                <a:solidFill>
-                  <a:srgbClr val="111111"/>
-                </a:solidFill>
-                <a:latin typeface="Times New Roman" pitchFamily="34" charset="0"/>
-                <a:ea typeface="Times New Roman" pitchFamily="34" charset="-122"/>
-                <a:cs typeface="Times New Roman" pitchFamily="34" charset="-120"/>
-              </a:rPr>
-              <a:t>Mediterranean vegetation: </a:t>
-            </a:r>
-            <a:pPr algn="l" indent="0" marL="0">
-              <a:spcAft>
-                <a:spcPts val="800"/>
-              </a:spcAft>
-              <a:buNone/>
-            </a:pPr>
-            <a:r>
-              <a:rPr lang="en-US" sz="4000" dirty="0">
-                <a:solidFill>
-                  <a:srgbClr val="111111"/>
-                </a:solidFill>
-                <a:latin typeface="Times New Roman" pitchFamily="34" charset="0"/>
-                <a:ea typeface="Times New Roman" pitchFamily="34" charset="-122"/>
-                <a:cs typeface="Times New Roman" pitchFamily="34" charset="-120"/>
-              </a:rPr>
-              <a:t>Plants such as the olive tree have small, hard leaves to resist the dry summer.</a:t>
-            </a:r>
-            <a:endParaRPr lang="en-US" sz="4000" dirty="0"/>
-          </a:p>
-          <a:p>
-            <a:pPr algn="l" indent="0" marL="0">
-              <a:spcAft>
-                <a:spcPts val="800"/>
-              </a:spcAft>
-              <a:buNone/>
-            </a:pPr>
-            <a:r>
-              <a:rPr lang="en-US" sz="4000" b="1" dirty="0">
-                <a:solidFill>
-                  <a:srgbClr val="111111"/>
-                </a:solidFill>
-                <a:latin typeface="Times New Roman" pitchFamily="34" charset="0"/>
-                <a:ea typeface="Times New Roman" pitchFamily="34" charset="-122"/>
-                <a:cs typeface="Times New Roman" pitchFamily="34" charset="-120"/>
-              </a:rPr>
-              <a:t>Temperate grasslands: </a:t>
-            </a:r>
-            <a:pPr algn="l" indent="0" marL="0">
-              <a:spcAft>
-                <a:spcPts val="800"/>
-              </a:spcAft>
-              <a:buNone/>
-            </a:pPr>
-            <a:r>
-              <a:rPr lang="en-US" sz="4000" dirty="0">
-                <a:solidFill>
-                  <a:srgbClr val="111111"/>
-                </a:solidFill>
-                <a:latin typeface="Times New Roman" pitchFamily="34" charset="0"/>
-                <a:ea typeface="Times New Roman" pitchFamily="34" charset="-122"/>
-                <a:cs typeface="Times New Roman" pitchFamily="34" charset="-120"/>
-              </a:rPr>
-              <a:t>The Prairies and the Steppes have short grass and few trees.</a:t>
-            </a:r>
-            <a:endParaRPr lang="en-US" sz="4000" dirty="0"/>
+              <a:t>Illustration: conifers</a:t>
+            </a:r>
+            <a:endParaRPr lang="en-US" sz="1600" dirty="0"/>
           </a:p>
         </p:txBody>
       </p:sp>
@@ -14285,7 +14564,7 @@
         <p:spPr>
           <a:xfrm>
             <a:off x="0" y="658368"/>
-            <a:ext cx="3840480" cy="5833872"/>
+            <a:ext cx="5120640" cy="5833872"/>
           </a:xfrm>
           <a:prstGeom prst="rect">
             <a:avLst/>
@@ -14300,8 +14579,8 @@
         </p:nvSpPr>
         <p:spPr>
           <a:xfrm>
-            <a:off x="4069080" y="1005840"/>
-            <a:ext cx="7802575" cy="731520"/>
+            <a:off x="5349240" y="1005840"/>
+            <a:ext cx="6522415" cy="731520"/>
           </a:xfrm>
           <a:prstGeom prst="rect">
             <a:avLst/>
@@ -14327,7 +14606,7 @@
                 <a:ea typeface="Times New Roman" pitchFamily="34" charset="-122"/>
                 <a:cs typeface="Times New Roman" pitchFamily="34" charset="-120"/>
               </a:rPr>
-              <a:t>2. Soils</a:t>
+              <a:t>1. Vegetation</a:t>
             </a:r>
             <a:endParaRPr lang="en-US" sz="3600" dirty="0"/>
           </a:p>
@@ -14341,8 +14620,8 @@
         </p:nvSpPr>
         <p:spPr>
           <a:xfrm>
-            <a:off x="4069080" y="1783080"/>
-            <a:ext cx="7802575" cy="4663440"/>
+            <a:off x="5349240" y="1783080"/>
+            <a:ext cx="6522415" cy="4663440"/>
           </a:xfrm>
           <a:prstGeom prst="rect">
             <a:avLst/>
@@ -14354,14 +14633,15 @@
           <a:bodyPr wrap="square" lIns="0" tIns="0" rIns="0" bIns="0" rtlCol="0" anchor="t"/>
           <a:lstStyle/>
           <a:p>
-            <a:pPr algn="l" indent="0" marL="0">
+            <a:pPr algn="l" marL="342900" indent="-342900">
               <a:spcAft>
                 <a:spcPts val="800"/>
               </a:spcAft>
-              <a:buNone/>
+              <a:buSzPct val="100000"/>
+              <a:buChar char="•"/>
             </a:pPr>
             <a:r>
-              <a:rPr lang="en-US" sz="4000" i="1" dirty="0">
+              <a:rPr lang="en-US" sz="4000" b="1" dirty="0">
                 <a:solidFill>
                   <a:srgbClr val="111111"/>
                 </a:solidFill>
@@ -14369,19 +14649,17 @@
                 <a:ea typeface="Times New Roman" pitchFamily="34" charset="-122"/>
                 <a:cs typeface="Times New Roman" pitchFamily="34" charset="-120"/>
               </a:rPr>
-              <a:t>The temperate region has the following types of soils:</a:t>
-            </a:r>
-            <a:endParaRPr lang="en-US" sz="4000" dirty="0"/>
-          </a:p>
-          <a:p>
-            <a:pPr algn="l" indent="0" marL="0">
+              <a:t>Mediterranean vegetation: </a:t>
+            </a:r>
+            <a:pPr algn="l" marL="342900" indent="-342900">
               <a:spcAft>
                 <a:spcPts val="800"/>
               </a:spcAft>
-              <a:buNone/>
+              <a:buSzPct val="100000"/>
+              <a:buChar char="•"/>
             </a:pPr>
             <a:r>
-              <a:rPr lang="en-US" sz="4000" b="1" dirty="0">
+              <a:rPr lang="en-US" sz="4000" dirty="0">
                 <a:solidFill>
                   <a:srgbClr val="111111"/>
                 </a:solidFill>
@@ -14389,61 +14667,7 @@
                 <a:ea typeface="Times New Roman" pitchFamily="34" charset="-122"/>
                 <a:cs typeface="Times New Roman" pitchFamily="34" charset="-120"/>
               </a:rPr>
-              <a:t>Brown forest soils: </a:t>
-            </a:r>
-            <a:pPr algn="l" indent="0" marL="0">
-              <a:spcAft>
-                <a:spcPts val="800"/>
-              </a:spcAft>
-              <a:buNone/>
-            </a:pPr>
-            <a:r>
-              <a:rPr lang="en-US" sz="4000" dirty="0">
-                <a:solidFill>
-                  <a:srgbClr val="111111"/>
-                </a:solidFill>
-                <a:latin typeface="Times New Roman" pitchFamily="34" charset="0"/>
-                <a:ea typeface="Times New Roman" pitchFamily="34" charset="-122"/>
-                <a:cs typeface="Times New Roman" pitchFamily="34" charset="-120"/>
-              </a:rPr>
-              <a:t>They are rich in humus from fallen leaves.</a:t>
-            </a:r>
-            <a:endParaRPr lang="en-US" sz="4000" dirty="0"/>
-          </a:p>
-          <a:p>
-            <a:pPr algn="l" indent="0" marL="0">
-              <a:spcAft>
-                <a:spcPts val="800"/>
-              </a:spcAft>
-              <a:buNone/>
-            </a:pPr>
-            <a:r>
-              <a:rPr lang="en-US" sz="4000" b="1" dirty="0">
-                <a:solidFill>
-                  <a:srgbClr val="111111"/>
-                </a:solidFill>
-                <a:latin typeface="Times New Roman" pitchFamily="34" charset="0"/>
-                <a:ea typeface="Times New Roman" pitchFamily="34" charset="-122"/>
-                <a:cs typeface="Times New Roman" pitchFamily="34" charset="-120"/>
-              </a:rPr>
-              <a:t>Podzols: </a:t>
-            </a:r>
-            <a:pPr algn="l" indent="0" marL="0">
-              <a:spcAft>
-                <a:spcPts val="800"/>
-              </a:spcAft>
-              <a:buNone/>
-            </a:pPr>
-            <a:r>
-              <a:rPr lang="en-US" sz="4000" dirty="0">
-                <a:solidFill>
-                  <a:srgbClr val="111111"/>
-                </a:solidFill>
-                <a:latin typeface="Times New Roman" pitchFamily="34" charset="0"/>
-                <a:ea typeface="Times New Roman" pitchFamily="34" charset="-122"/>
-                <a:cs typeface="Times New Roman" pitchFamily="34" charset="-120"/>
-              </a:rPr>
-              <a:t>They are grey, acid and poor soils under coniferous forests.</a:t>
+              <a:t>Olive trees and shrubs with small, hard leaves.</a:t>
             </a:r>
             <a:endParaRPr lang="en-US" sz="4000" dirty="0"/>
           </a:p>
@@ -14561,9 +14785,111 @@
           </a:p>
         </p:txBody>
       </p:sp>
+      <p:sp>
+        <p:nvSpPr>
+          <p:cNvPr id="3" name="Text 1"/>
+          <p:cNvSpPr/>
+          <p:nvPr/>
+        </p:nvSpPr>
+        <p:spPr>
+          <a:xfrm>
+            <a:off x="365760" y="1005840"/>
+            <a:ext cx="11460175" cy="731520"/>
+          </a:xfrm>
+          <a:prstGeom prst="rect">
+            <a:avLst/>
+          </a:prstGeom>
+          <a:noFill/>
+          <a:ln/>
+        </p:spPr>
+        <p:txBody>
+          <a:bodyPr wrap="square" lIns="0" tIns="0" rIns="0" bIns="0" rtlCol="0" anchor="ctr">
+            <a:normAutofit/>
+          </a:bodyPr>
+          <a:lstStyle/>
+          <a:p>
+            <a:pPr algn="ctr" indent="0" marL="0">
+              <a:buNone/>
+            </a:pPr>
+            <a:r>
+              <a:rPr lang="en-US" sz="3600" b="1" dirty="0">
+                <a:solidFill>
+                  <a:srgbClr val="990011"/>
+                </a:solidFill>
+                <a:latin typeface="Times New Roman" pitchFamily="34" charset="0"/>
+                <a:ea typeface="Times New Roman" pitchFamily="34" charset="-122"/>
+                <a:cs typeface="Times New Roman" pitchFamily="34" charset="-120"/>
+              </a:rPr>
+              <a:t>1. Vegetation</a:t>
+            </a:r>
+            <a:endParaRPr lang="en-US" sz="3600" dirty="0"/>
+          </a:p>
+        </p:txBody>
+      </p:sp>
+      <p:sp>
+        <p:nvSpPr>
+          <p:cNvPr id="4" name="Text 2"/>
+          <p:cNvSpPr/>
+          <p:nvPr/>
+        </p:nvSpPr>
+        <p:spPr>
+          <a:xfrm>
+            <a:off x="365760" y="1783080"/>
+            <a:ext cx="4846320" cy="4617720"/>
+          </a:xfrm>
+          <a:prstGeom prst="rect">
+            <a:avLst/>
+          </a:prstGeom>
+          <a:noFill/>
+          <a:ln/>
+        </p:spPr>
+        <p:txBody>
+          <a:bodyPr wrap="square" lIns="0" tIns="0" rIns="0" bIns="0" rtlCol="0" anchor="t"/>
+          <a:lstStyle/>
+          <a:p>
+            <a:pPr algn="l" marL="342900" indent="-342900">
+              <a:spcAft>
+                <a:spcPts val="800"/>
+              </a:spcAft>
+              <a:buSzPct val="100000"/>
+              <a:buChar char="•"/>
+            </a:pPr>
+            <a:r>
+              <a:rPr lang="en-US" sz="3600" b="1" dirty="0">
+                <a:solidFill>
+                  <a:srgbClr val="111111"/>
+                </a:solidFill>
+                <a:latin typeface="Times New Roman" pitchFamily="34" charset="0"/>
+                <a:ea typeface="Times New Roman" pitchFamily="34" charset="-122"/>
+                <a:cs typeface="Times New Roman" pitchFamily="34" charset="-120"/>
+              </a:rPr>
+              <a:t>Temperate grasslands: </a:t>
+            </a:r>
+            <a:pPr algn="l" marL="342900" indent="-342900">
+              <a:spcAft>
+                <a:spcPts val="800"/>
+              </a:spcAft>
+              <a:buSzPct val="100000"/>
+              <a:buChar char="•"/>
+            </a:pPr>
+            <a:r>
+              <a:rPr lang="en-US" sz="3600" dirty="0">
+                <a:solidFill>
+                  <a:srgbClr val="111111"/>
+                </a:solidFill>
+                <a:latin typeface="Times New Roman" pitchFamily="34" charset="0"/>
+                <a:ea typeface="Times New Roman" pitchFamily="34" charset="-122"/>
+                <a:cs typeface="Times New Roman" pitchFamily="34" charset="-120"/>
+              </a:rPr>
+              <a:t>Prairies and steppes with few trees.</a:t>
+            </a:r>
+            <a:endParaRPr lang="en-US" sz="3600" dirty="0"/>
+          </a:p>
+        </p:txBody>
+      </p:sp>
       <p:pic>
         <p:nvPicPr>
-          <p:cNvPr id="3" name="Image 0" descr="/home/claude/f4/img/minesec_sheet.png">    </p:cNvPr>
+          <p:cNvPr id="5" name="Image 0" descr="/home/claude/f4/img/v2/f2t_prairie.jpg">    </p:cNvPr>
           <p:cNvPicPr>
             <a:picLocks noChangeAspect="1"/>
           </p:cNvPicPr>
@@ -14577,8 +14903,8 @@
         </p:blipFill>
         <p:spPr>
           <a:xfrm>
-            <a:off x="0" y="658368"/>
-            <a:ext cx="5120640" cy="5833872"/>
+            <a:off x="5349240" y="2071212"/>
+            <a:ext cx="6659575" cy="3693983"/>
           </a:xfrm>
           <a:prstGeom prst="rect">
             <a:avLst/>
@@ -14587,14 +14913,14 @@
       </p:pic>
       <p:sp>
         <p:nvSpPr>
-          <p:cNvPr id="4" name="Text 1"/>
+          <p:cNvPr id="6" name="Text 3"/>
           <p:cNvSpPr/>
           <p:nvPr/>
         </p:nvSpPr>
         <p:spPr>
           <a:xfrm>
-            <a:off x="5349240" y="1005840"/>
-            <a:ext cx="6522415" cy="731520"/>
+            <a:off x="5349240" y="6089904"/>
+            <a:ext cx="6659575" cy="347472"/>
           </a:xfrm>
           <a:prstGeom prst="rect">
             <a:avLst/>
@@ -14603,122 +14929,24 @@
           <a:ln/>
         </p:spPr>
         <p:txBody>
-          <a:bodyPr wrap="square" lIns="0" tIns="0" rIns="0" bIns="0" rtlCol="0" anchor="ctr">
-            <a:normAutofit/>
-          </a:bodyPr>
+          <a:bodyPr wrap="square" lIns="0" tIns="0" rIns="0" bIns="0" rtlCol="0" anchor="ctr"/>
           <a:lstStyle/>
           <a:p>
             <a:pPr algn="ctr" indent="0" marL="0">
               <a:buNone/>
             </a:pPr>
             <a:r>
-              <a:rPr lang="en-US" sz="3600" b="1" dirty="0">
-                <a:solidFill>
-                  <a:srgbClr val="990011"/>
+              <a:rPr lang="en-US" sz="1600" i="1" dirty="0">
+                <a:solidFill>
+                  <a:srgbClr val="555555"/>
                 </a:solidFill>
                 <a:latin typeface="Times New Roman" pitchFamily="34" charset="0"/>
                 <a:ea typeface="Times New Roman" pitchFamily="34" charset="-122"/>
                 <a:cs typeface="Times New Roman" pitchFamily="34" charset="-120"/>
               </a:rPr>
-              <a:t>2. Soils (continued)</a:t>
-            </a:r>
-            <a:endParaRPr lang="en-US" sz="3600" dirty="0"/>
-          </a:p>
-        </p:txBody>
-      </p:sp>
-      <p:sp>
-        <p:nvSpPr>
-          <p:cNvPr id="5" name="Text 2"/>
-          <p:cNvSpPr/>
-          <p:nvPr/>
-        </p:nvSpPr>
-        <p:spPr>
-          <a:xfrm>
-            <a:off x="5349240" y="1783080"/>
-            <a:ext cx="6522415" cy="4663440"/>
-          </a:xfrm>
-          <a:prstGeom prst="rect">
-            <a:avLst/>
-          </a:prstGeom>
-          <a:noFill/>
-          <a:ln/>
-        </p:spPr>
-        <p:txBody>
-          <a:bodyPr wrap="square" lIns="0" tIns="0" rIns="0" bIns="0" rtlCol="0" anchor="t"/>
-          <a:lstStyle/>
-          <a:p>
-            <a:pPr algn="l" indent="0" marL="0">
-              <a:spcAft>
-                <a:spcPts val="800"/>
-              </a:spcAft>
-              <a:buNone/>
-            </a:pPr>
-            <a:r>
-              <a:rPr lang="en-US" sz="4000" b="1" dirty="0">
-                <a:solidFill>
-                  <a:srgbClr val="111111"/>
-                </a:solidFill>
-                <a:latin typeface="Times New Roman" pitchFamily="34" charset="0"/>
-                <a:ea typeface="Times New Roman" pitchFamily="34" charset="-122"/>
-                <a:cs typeface="Times New Roman" pitchFamily="34" charset="-120"/>
-              </a:rPr>
-              <a:t>Chernozems: </a:t>
-            </a:r>
-            <a:pPr algn="l" indent="0" marL="0">
-              <a:spcAft>
-                <a:spcPts val="800"/>
-              </a:spcAft>
-              <a:buNone/>
-            </a:pPr>
-            <a:r>
-              <a:rPr lang="en-US" sz="4000" dirty="0">
-                <a:solidFill>
-                  <a:srgbClr val="111111"/>
-                </a:solidFill>
-                <a:latin typeface="Times New Roman" pitchFamily="34" charset="0"/>
-                <a:ea typeface="Times New Roman" pitchFamily="34" charset="-122"/>
-                <a:cs typeface="Times New Roman" pitchFamily="34" charset="-120"/>
-              </a:rPr>
-              <a:t>They are black and very rich soils of the grasslands.</a:t>
-            </a:r>
-            <a:endParaRPr lang="en-US" sz="4000" dirty="0"/>
-          </a:p>
-          <a:p>
-            <a:pPr algn="l" indent="0" marL="0">
-              <a:spcAft>
-                <a:spcPts val="800"/>
-              </a:spcAft>
-              <a:buNone/>
-            </a:pPr>
-            <a:r>
-              <a:rPr lang="en-US" sz="4000" b="1" dirty="0">
-                <a:solidFill>
-                  <a:srgbClr val="111111"/>
-                </a:solidFill>
-                <a:latin typeface="Times New Roman" pitchFamily="34" charset="0"/>
-                <a:ea typeface="Times New Roman" pitchFamily="34" charset="-122"/>
-                <a:cs typeface="Times New Roman" pitchFamily="34" charset="-120"/>
-              </a:rPr>
-              <a:t>Red Mediterranean soils: </a:t>
-            </a:r>
-            <a:pPr algn="l" indent="0" marL="0">
-              <a:spcAft>
-                <a:spcPts val="800"/>
-              </a:spcAft>
-              <a:buNone/>
-            </a:pPr>
-            <a:r>
-              <a:rPr lang="en-US" sz="4000" dirty="0">
-                <a:solidFill>
-                  <a:srgbClr val="111111"/>
-                </a:solidFill>
-                <a:latin typeface="Times New Roman" pitchFamily="34" charset="0"/>
-                <a:ea typeface="Times New Roman" pitchFamily="34" charset="-122"/>
-                <a:cs typeface="Times New Roman" pitchFamily="34" charset="-120"/>
-              </a:rPr>
-              <a:t>They are found around the Mediterranean Sea.</a:t>
-            </a:r>
-            <a:endParaRPr lang="en-US" sz="4000" dirty="0"/>
+              <a:t>Illustration: a temperate grassland</a:t>
+            </a:r>
+            <a:endParaRPr lang="en-US" sz="1600" dirty="0"/>
           </a:p>
         </p:txBody>
       </p:sp>
@@ -15067,7 +15295,7 @@
                 <a:ea typeface="Calibri" pitchFamily="34" charset="-122"/>
                 <a:cs typeface="Calibri" pitchFamily="34" charset="-120"/>
               </a:rPr>
-              <a:t>FORMATIVE EVALUATION</a:t>
+              <a:t>BOARD SUMMARY</a:t>
             </a:r>
             <a:endParaRPr lang="en-US" sz="1400" dirty="0"/>
           </a:p>
@@ -15132,7 +15360,7 @@
                 <a:ea typeface="Times New Roman" pitchFamily="34" charset="-122"/>
                 <a:cs typeface="Times New Roman" pitchFamily="34" charset="-120"/>
               </a:rPr>
-              <a:t>Evaluation 1</a:t>
+              <a:t>2. Soils</a:t>
             </a:r>
             <a:endParaRPr lang="en-US" sz="3600" dirty="0"/>
           </a:p>
@@ -15166,7 +15394,7 @@
               <a:buNone/>
             </a:pPr>
             <a:r>
-              <a:rPr lang="en-US" sz="4000" dirty="0">
+              <a:rPr lang="en-US" sz="4000" i="1" dirty="0">
                 <a:solidFill>
                   <a:srgbClr val="111111"/>
                 </a:solidFill>
@@ -15174,7 +15402,85 @@
                 <a:ea typeface="Times New Roman" pitchFamily="34" charset="-122"/>
                 <a:cs typeface="Times New Roman" pitchFamily="34" charset="-120"/>
               </a:rPr>
-              <a:t>Why do deciduous trees lose their leaves in autumn?</a:t>
+              <a:t>The temperate region has the following soils:</a:t>
+            </a:r>
+            <a:endParaRPr lang="en-US" sz="4000" dirty="0"/>
+          </a:p>
+          <a:p>
+            <a:pPr algn="l" marL="342900" indent="-342900">
+              <a:spcAft>
+                <a:spcPts val="800"/>
+              </a:spcAft>
+              <a:buSzPct val="100000"/>
+              <a:buChar char="•"/>
+            </a:pPr>
+            <a:r>
+              <a:rPr lang="en-US" sz="4000" b="1" dirty="0">
+                <a:solidFill>
+                  <a:srgbClr val="111111"/>
+                </a:solidFill>
+                <a:latin typeface="Times New Roman" pitchFamily="34" charset="0"/>
+                <a:ea typeface="Times New Roman" pitchFamily="34" charset="-122"/>
+                <a:cs typeface="Times New Roman" pitchFamily="34" charset="-120"/>
+              </a:rPr>
+              <a:t>Brown forest soils: </a:t>
+            </a:r>
+            <a:pPr algn="l" marL="342900" indent="-342900">
+              <a:spcAft>
+                <a:spcPts val="800"/>
+              </a:spcAft>
+              <a:buSzPct val="100000"/>
+              <a:buChar char="•"/>
+            </a:pPr>
+            <a:r>
+              <a:rPr lang="en-US" sz="4000" dirty="0">
+                <a:solidFill>
+                  <a:srgbClr val="111111"/>
+                </a:solidFill>
+                <a:latin typeface="Times New Roman" pitchFamily="34" charset="0"/>
+                <a:ea typeface="Times New Roman" pitchFamily="34" charset="-122"/>
+                <a:cs typeface="Times New Roman" pitchFamily="34" charset="-120"/>
+              </a:rPr>
+              <a:t>Fertile soils under deciduous forests.</a:t>
+            </a:r>
+            <a:endParaRPr lang="en-US" sz="4000" dirty="0"/>
+          </a:p>
+          <a:p>
+            <a:pPr algn="l" marL="342900" indent="-342900">
+              <a:spcAft>
+                <a:spcPts val="800"/>
+              </a:spcAft>
+              <a:buSzPct val="100000"/>
+              <a:buChar char="•"/>
+            </a:pPr>
+            <a:r>
+              <a:rPr lang="en-US" sz="4000" b="1" dirty="0">
+                <a:solidFill>
+                  <a:srgbClr val="111111"/>
+                </a:solidFill>
+                <a:latin typeface="Times New Roman" pitchFamily="34" charset="0"/>
+                <a:ea typeface="Times New Roman" pitchFamily="34" charset="-122"/>
+                <a:cs typeface="Times New Roman" pitchFamily="34" charset="-120"/>
+              </a:rPr>
+              <a:t>Podzols: </a:t>
+            </a:r>
+            <a:pPr algn="l" marL="342900" indent="-342900">
+              <a:spcAft>
+                <a:spcPts val="800"/>
+              </a:spcAft>
+              <a:buSzPct val="100000"/>
+              <a:buChar char="•"/>
+            </a:pPr>
+            <a:r>
+              <a:rPr lang="en-US" sz="4000" dirty="0">
+                <a:solidFill>
+                  <a:srgbClr val="111111"/>
+                </a:solidFill>
+                <a:latin typeface="Times New Roman" pitchFamily="34" charset="0"/>
+                <a:ea typeface="Times New Roman" pitchFamily="34" charset="-122"/>
+                <a:cs typeface="Times New Roman" pitchFamily="34" charset="-120"/>
+              </a:rPr>
+              <a:t>Grey, acid soils under conifers.</a:t>
             </a:r>
             <a:endParaRPr lang="en-US" sz="4000" dirty="0"/>
           </a:p>
@@ -15286,15 +15592,117 @@
                 <a:ea typeface="Calibri" pitchFamily="34" charset="-122"/>
                 <a:cs typeface="Calibri" pitchFamily="34" charset="-120"/>
               </a:rPr>
-              <a:t>FORMATIVE EVALUATION</a:t>
+              <a:t>BOARD SUMMARY</a:t>
             </a:r>
             <a:endParaRPr lang="en-US" sz="1400" dirty="0"/>
+          </a:p>
+        </p:txBody>
+      </p:sp>
+      <p:sp>
+        <p:nvSpPr>
+          <p:cNvPr id="3" name="Text 1"/>
+          <p:cNvSpPr/>
+          <p:nvPr/>
+        </p:nvSpPr>
+        <p:spPr>
+          <a:xfrm>
+            <a:off x="365760" y="1005840"/>
+            <a:ext cx="11460175" cy="731520"/>
+          </a:xfrm>
+          <a:prstGeom prst="rect">
+            <a:avLst/>
+          </a:prstGeom>
+          <a:noFill/>
+          <a:ln/>
+        </p:spPr>
+        <p:txBody>
+          <a:bodyPr wrap="square" lIns="0" tIns="0" rIns="0" bIns="0" rtlCol="0" anchor="ctr">
+            <a:normAutofit/>
+          </a:bodyPr>
+          <a:lstStyle/>
+          <a:p>
+            <a:pPr algn="ctr" indent="0" marL="0">
+              <a:buNone/>
+            </a:pPr>
+            <a:r>
+              <a:rPr lang="en-US" sz="3600" b="1" dirty="0">
+                <a:solidFill>
+                  <a:srgbClr val="990011"/>
+                </a:solidFill>
+                <a:latin typeface="Times New Roman" pitchFamily="34" charset="0"/>
+                <a:ea typeface="Times New Roman" pitchFamily="34" charset="-122"/>
+                <a:cs typeface="Times New Roman" pitchFamily="34" charset="-120"/>
+              </a:rPr>
+              <a:t>2. Soils</a:t>
+            </a:r>
+            <a:endParaRPr lang="en-US" sz="3600" dirty="0"/>
+          </a:p>
+        </p:txBody>
+      </p:sp>
+      <p:sp>
+        <p:nvSpPr>
+          <p:cNvPr id="4" name="Text 2"/>
+          <p:cNvSpPr/>
+          <p:nvPr/>
+        </p:nvSpPr>
+        <p:spPr>
+          <a:xfrm>
+            <a:off x="365760" y="1783080"/>
+            <a:ext cx="4846320" cy="4617720"/>
+          </a:xfrm>
+          <a:prstGeom prst="rect">
+            <a:avLst/>
+          </a:prstGeom>
+          <a:noFill/>
+          <a:ln/>
+        </p:spPr>
+        <p:txBody>
+          <a:bodyPr wrap="square" lIns="0" tIns="0" rIns="0" bIns="0" rtlCol="0" anchor="t"/>
+          <a:lstStyle/>
+          <a:p>
+            <a:pPr algn="l" marL="342900" indent="-342900">
+              <a:spcAft>
+                <a:spcPts val="800"/>
+              </a:spcAft>
+              <a:buSzPct val="100000"/>
+              <a:buChar char="•"/>
+            </a:pPr>
+            <a:r>
+              <a:rPr lang="en-US" sz="3600" b="1" dirty="0">
+                <a:solidFill>
+                  <a:srgbClr val="111111"/>
+                </a:solidFill>
+                <a:latin typeface="Times New Roman" pitchFamily="34" charset="0"/>
+                <a:ea typeface="Times New Roman" pitchFamily="34" charset="-122"/>
+                <a:cs typeface="Times New Roman" pitchFamily="34" charset="-120"/>
+              </a:rPr>
+              <a:t>Black soils (chernozems): </a:t>
+            </a:r>
+            <a:pPr algn="l" marL="342900" indent="-342900">
+              <a:spcAft>
+                <a:spcPts val="800"/>
+              </a:spcAft>
+              <a:buSzPct val="100000"/>
+              <a:buChar char="•"/>
+            </a:pPr>
+            <a:r>
+              <a:rPr lang="en-US" sz="3600" dirty="0">
+                <a:solidFill>
+                  <a:srgbClr val="111111"/>
+                </a:solidFill>
+                <a:latin typeface="Times New Roman" pitchFamily="34" charset="0"/>
+                <a:ea typeface="Times New Roman" pitchFamily="34" charset="-122"/>
+                <a:cs typeface="Times New Roman" pitchFamily="34" charset="-120"/>
+              </a:rPr>
+              <a:t>Very fertile grassland soils, good for wheat.</a:t>
+            </a:r>
+            <a:endParaRPr lang="en-US" sz="3600" dirty="0"/>
           </a:p>
         </p:txBody>
       </p:sp>
       <p:pic>
         <p:nvPicPr>
-          <p:cNvPr id="3" name="Image 0" descr="/home/claude/f4/img/minesec_sheet.png">    </p:cNvPr>
+          <p:cNvPr id="5" name="Image 0" descr="/home/claude/f4/img/v2/f2t_black_soil.jpg">    </p:cNvPr>
           <p:cNvPicPr>
             <a:picLocks noChangeAspect="1"/>
           </p:cNvPicPr>
@@ -15308,8 +15716,8 @@
         </p:blipFill>
         <p:spPr>
           <a:xfrm>
-            <a:off x="0" y="658368"/>
-            <a:ext cx="5120640" cy="5833872"/>
+            <a:off x="5349240" y="2071212"/>
+            <a:ext cx="6659575" cy="3693983"/>
           </a:xfrm>
           <a:prstGeom prst="rect">
             <a:avLst/>
@@ -15318,14 +15726,14 @@
       </p:pic>
       <p:sp>
         <p:nvSpPr>
-          <p:cNvPr id="4" name="Text 1"/>
+          <p:cNvPr id="6" name="Text 3"/>
           <p:cNvSpPr/>
           <p:nvPr/>
         </p:nvSpPr>
         <p:spPr>
           <a:xfrm>
-            <a:off x="5349240" y="1005840"/>
-            <a:ext cx="6522415" cy="731520"/>
+            <a:off x="5349240" y="6089904"/>
+            <a:ext cx="6659575" cy="347472"/>
           </a:xfrm>
           <a:prstGeom prst="rect">
             <a:avLst/>
@@ -15334,68 +15742,24 @@
           <a:ln/>
         </p:spPr>
         <p:txBody>
-          <a:bodyPr wrap="square" lIns="0" tIns="0" rIns="0" bIns="0" rtlCol="0" anchor="ctr">
-            <a:normAutofit/>
-          </a:bodyPr>
+          <a:bodyPr wrap="square" lIns="0" tIns="0" rIns="0" bIns="0" rtlCol="0" anchor="ctr"/>
           <a:lstStyle/>
           <a:p>
             <a:pPr algn="ctr" indent="0" marL="0">
               <a:buNone/>
             </a:pPr>
             <a:r>
-              <a:rPr lang="en-US" sz="3600" b="1" dirty="0">
-                <a:solidFill>
-                  <a:srgbClr val="990011"/>
+              <a:rPr lang="en-US" sz="1600" i="1" dirty="0">
+                <a:solidFill>
+                  <a:srgbClr val="555555"/>
                 </a:solidFill>
                 <a:latin typeface="Times New Roman" pitchFamily="34" charset="0"/>
                 <a:ea typeface="Times New Roman" pitchFamily="34" charset="-122"/>
                 <a:cs typeface="Times New Roman" pitchFamily="34" charset="-120"/>
               </a:rPr>
-              <a:t>Expected Answer</a:t>
-            </a:r>
-            <a:endParaRPr lang="en-US" sz="3600" dirty="0"/>
-          </a:p>
-        </p:txBody>
-      </p:sp>
-      <p:sp>
-        <p:nvSpPr>
-          <p:cNvPr id="5" name="Text 2"/>
-          <p:cNvSpPr/>
-          <p:nvPr/>
-        </p:nvSpPr>
-        <p:spPr>
-          <a:xfrm>
-            <a:off x="5349240" y="1783080"/>
-            <a:ext cx="6522415" cy="4663440"/>
-          </a:xfrm>
-          <a:prstGeom prst="rect">
-            <a:avLst/>
-          </a:prstGeom>
-          <a:noFill/>
-          <a:ln/>
-        </p:spPr>
-        <p:txBody>
-          <a:bodyPr wrap="square" lIns="0" tIns="0" rIns="0" bIns="0" rtlCol="0" anchor="t"/>
-          <a:lstStyle/>
-          <a:p>
-            <a:pPr algn="l" indent="0" marL="0">
-              <a:spcAft>
-                <a:spcPts val="800"/>
-              </a:spcAft>
-              <a:buNone/>
-            </a:pPr>
-            <a:r>
-              <a:rPr lang="en-US" sz="4000" dirty="0">
-                <a:solidFill>
-                  <a:srgbClr val="111111"/>
-                </a:solidFill>
-                <a:latin typeface="Times New Roman" pitchFamily="34" charset="0"/>
-                <a:ea typeface="Times New Roman" pitchFamily="34" charset="-122"/>
-                <a:cs typeface="Times New Roman" pitchFamily="34" charset="-120"/>
-              </a:rPr>
-              <a:t>To survive the cold winter.</a:t>
-            </a:r>
-            <a:endParaRPr lang="en-US" sz="4000" dirty="0"/>
+              <a:t>Illustration: a black soil</a:t>
+            </a:r>
+            <a:endParaRPr lang="en-US" sz="1600" dirty="0"/>
           </a:p>
         </p:txBody>
       </p:sp>
@@ -15505,7 +15869,7 @@
                 <a:ea typeface="Calibri" pitchFamily="34" charset="-122"/>
                 <a:cs typeface="Calibri" pitchFamily="34" charset="-120"/>
               </a:rPr>
-              <a:t>FORMATIVE EVALUATION</a:t>
+              <a:t>BOARD SUMMARY</a:t>
             </a:r>
             <a:endParaRPr lang="en-US" sz="1400" dirty="0"/>
           </a:p>
@@ -15570,7 +15934,7 @@
                 <a:ea typeface="Times New Roman" pitchFamily="34" charset="-122"/>
                 <a:cs typeface="Times New Roman" pitchFamily="34" charset="-120"/>
               </a:rPr>
-              <a:t>Evaluation 2</a:t>
+              <a:t>2. Soils</a:t>
             </a:r>
             <a:endParaRPr lang="en-US" sz="3600" dirty="0"/>
           </a:p>
@@ -15597,14 +15961,15 @@
           <a:bodyPr wrap="square" lIns="0" tIns="0" rIns="0" bIns="0" rtlCol="0" anchor="t"/>
           <a:lstStyle/>
           <a:p>
-            <a:pPr algn="l" indent="0" marL="0">
+            <a:pPr algn="l" marL="342900" indent="-342900">
               <a:spcAft>
                 <a:spcPts val="800"/>
               </a:spcAft>
-              <a:buNone/>
+              <a:buSzPct val="100000"/>
+              <a:buChar char="•"/>
             </a:pPr>
             <a:r>
-              <a:rPr lang="en-US" sz="4000" dirty="0">
+              <a:rPr lang="en-US" sz="4000" b="1" dirty="0">
                 <a:solidFill>
                   <a:srgbClr val="111111"/>
                 </a:solidFill>
@@ -15612,7 +15977,25 @@
                 <a:ea typeface="Times New Roman" pitchFamily="34" charset="-122"/>
                 <a:cs typeface="Times New Roman" pitchFamily="34" charset="-120"/>
               </a:rPr>
-              <a:t>Why is the chernozem good for wheat?</a:t>
+              <a:t>Red Mediterranean soils: </a:t>
+            </a:r>
+            <a:pPr algn="l" marL="342900" indent="-342900">
+              <a:spcAft>
+                <a:spcPts val="800"/>
+              </a:spcAft>
+              <a:buSzPct val="100000"/>
+              <a:buChar char="•"/>
+            </a:pPr>
+            <a:r>
+              <a:rPr lang="en-US" sz="4000" dirty="0">
+                <a:solidFill>
+                  <a:srgbClr val="111111"/>
+                </a:solidFill>
+                <a:latin typeface="Times New Roman" pitchFamily="34" charset="0"/>
+                <a:ea typeface="Times New Roman" pitchFamily="34" charset="-122"/>
+                <a:cs typeface="Times New Roman" pitchFamily="34" charset="-120"/>
+              </a:rPr>
+              <a:t>Soils good for olives and grapes.</a:t>
             </a:r>
             <a:endParaRPr lang="en-US" sz="4000" dirty="0"/>
           </a:p>
@@ -15789,7 +16172,7 @@
                 <a:ea typeface="Times New Roman" pitchFamily="34" charset="-122"/>
                 <a:cs typeface="Times New Roman" pitchFamily="34" charset="-120"/>
               </a:rPr>
-              <a:t>Expected Answer</a:t>
+              <a:t>Evaluation 1</a:t>
             </a:r>
             <a:endParaRPr lang="en-US" sz="3600" dirty="0"/>
           </a:p>
@@ -15831,7 +16214,7 @@
                 <a:ea typeface="Times New Roman" pitchFamily="34" charset="-122"/>
                 <a:cs typeface="Times New Roman" pitchFamily="34" charset="-120"/>
               </a:rPr>
-              <a:t>It is black and full of humus, so it is very fertile.</a:t>
+              <a:t>Why do deciduous trees lose their leaves in autumn?</a:t>
             </a:r>
             <a:endParaRPr lang="en-US" sz="4000" dirty="0"/>
           </a:p>
@@ -15943,7 +16326,7 @@
                 <a:ea typeface="Calibri" pitchFamily="34" charset="-122"/>
                 <a:cs typeface="Calibri" pitchFamily="34" charset="-120"/>
               </a:rPr>
-              <a:t>REMEDIATION</a:t>
+              <a:t>FORMATIVE EVALUATION</a:t>
             </a:r>
             <a:endParaRPr lang="en-US" sz="1400" dirty="0"/>
           </a:p>
@@ -15966,7 +16349,7 @@
         <p:spPr>
           <a:xfrm>
             <a:off x="0" y="658368"/>
-            <a:ext cx="3840480" cy="5833872"/>
+            <a:ext cx="5120640" cy="5833872"/>
           </a:xfrm>
           <a:prstGeom prst="rect">
             <a:avLst/>
@@ -15981,8 +16364,8 @@
         </p:nvSpPr>
         <p:spPr>
           <a:xfrm>
-            <a:off x="4069080" y="1005840"/>
-            <a:ext cx="7802575" cy="731520"/>
+            <a:off x="5349240" y="1005840"/>
+            <a:ext cx="6522415" cy="731520"/>
           </a:xfrm>
           <a:prstGeom prst="rect">
             <a:avLst/>
@@ -16008,7 +16391,7 @@
                 <a:ea typeface="Times New Roman" pitchFamily="34" charset="-122"/>
                 <a:cs typeface="Times New Roman" pitchFamily="34" charset="-120"/>
               </a:rPr>
-              <a:t>Remediation</a:t>
+              <a:t>Expected Answer</a:t>
             </a:r>
             <a:endParaRPr lang="en-US" sz="3600" dirty="0"/>
           </a:p>
@@ -16022,8 +16405,8 @@
         </p:nvSpPr>
         <p:spPr>
           <a:xfrm>
-            <a:off x="4069080" y="1783080"/>
-            <a:ext cx="7802575" cy="4663440"/>
+            <a:off x="5349240" y="1783080"/>
+            <a:ext cx="6522415" cy="4663440"/>
           </a:xfrm>
           <a:prstGeom prst="rect">
             <a:avLst/>
@@ -16042,7 +16425,7 @@
               <a:buNone/>
             </a:pPr>
             <a:r>
-              <a:rPr lang="en-US" sz="4000" b="1" dirty="0">
+              <a:rPr lang="en-US" sz="4000" dirty="0">
                 <a:solidFill>
                   <a:srgbClr val="111111"/>
                 </a:solidFill>
@@ -16050,73 +16433,7 @@
                 <a:ea typeface="Times New Roman" pitchFamily="34" charset="-122"/>
                 <a:cs typeface="Times New Roman" pitchFamily="34" charset="-120"/>
               </a:rPr>
-              <a:t>Fill in the blanks:</a:t>
-            </a:r>
-            <a:endParaRPr lang="en-US" sz="4000" dirty="0"/>
-          </a:p>
-          <a:p>
-            <a:pPr algn="l" marL="342900" indent="-342900">
-              <a:spcAft>
-                <a:spcPts val="800"/>
-              </a:spcAft>
-              <a:buSzPct val="100000"/>
-              <a:buFont typeface="+mj-lt"/>
-              <a:buAutoNum type="arabicPeriod" startAt="1"/>
-            </a:pPr>
-            <a:r>
-              <a:rPr lang="en-US" sz="4000" dirty="0">
-                <a:solidFill>
-                  <a:srgbClr val="111111"/>
-                </a:solidFill>
-                <a:latin typeface="Times New Roman" pitchFamily="34" charset="0"/>
-                <a:ea typeface="Times New Roman" pitchFamily="34" charset="-122"/>
-                <a:cs typeface="Times New Roman" pitchFamily="34" charset="-120"/>
-              </a:rPr>
-              <a:t>Trees that lose their leaves in autumn form a ______ forest.</a:t>
-            </a:r>
-            <a:endParaRPr lang="en-US" sz="4000" dirty="0"/>
-          </a:p>
-          <a:p>
-            <a:pPr algn="l" marL="342900" indent="-342900">
-              <a:spcAft>
-                <a:spcPts val="800"/>
-              </a:spcAft>
-              <a:buSzPct val="100000"/>
-              <a:buFont typeface="+mj-lt"/>
-              <a:buAutoNum type="arabicPeriod" startAt="1"/>
-            </a:pPr>
-            <a:r>
-              <a:rPr lang="en-US" sz="4000" dirty="0">
-                <a:solidFill>
-                  <a:srgbClr val="111111"/>
-                </a:solidFill>
-                <a:latin typeface="Times New Roman" pitchFamily="34" charset="0"/>
-                <a:ea typeface="Times New Roman" pitchFamily="34" charset="-122"/>
-                <a:cs typeface="Times New Roman" pitchFamily="34" charset="-120"/>
-              </a:rPr>
-              <a:t>Pine trees have ______ leaves.</a:t>
-            </a:r>
-            <a:endParaRPr lang="en-US" sz="4000" dirty="0"/>
-          </a:p>
-          <a:p>
-            <a:pPr algn="l" marL="342900" indent="-342900">
-              <a:spcAft>
-                <a:spcPts val="800"/>
-              </a:spcAft>
-              <a:buSzPct val="100000"/>
-              <a:buFont typeface="+mj-lt"/>
-              <a:buAutoNum type="arabicPeriod" startAt="1"/>
-            </a:pPr>
-            <a:r>
-              <a:rPr lang="en-US" sz="4000" dirty="0">
-                <a:solidFill>
-                  <a:srgbClr val="111111"/>
-                </a:solidFill>
-                <a:latin typeface="Times New Roman" pitchFamily="34" charset="0"/>
-                <a:ea typeface="Times New Roman" pitchFamily="34" charset="-122"/>
-                <a:cs typeface="Times New Roman" pitchFamily="34" charset="-120"/>
-              </a:rPr>
-              <a:t>The black, rich soil of grasslands is the ______.</a:t>
+              <a:t>To survive the cold winter.</a:t>
             </a:r>
             <a:endParaRPr lang="en-US" sz="4000" dirty="0"/>
           </a:p>
@@ -16228,7 +16545,7 @@
                 <a:ea typeface="Calibri" pitchFamily="34" charset="-122"/>
                 <a:cs typeface="Calibri" pitchFamily="34" charset="-120"/>
               </a:rPr>
-              <a:t>HOMEWORK</a:t>
+              <a:t>FORMATIVE EVALUATION</a:t>
             </a:r>
             <a:endParaRPr lang="en-US" sz="1400" dirty="0"/>
           </a:p>
@@ -16293,7 +16610,7 @@
                 <a:ea typeface="Times New Roman" pitchFamily="34" charset="-122"/>
                 <a:cs typeface="Times New Roman" pitchFamily="34" charset="-120"/>
               </a:rPr>
-              <a:t>Homework</a:t>
+              <a:t>Evaluation 2</a:t>
             </a:r>
             <a:endParaRPr lang="en-US" sz="3600" dirty="0"/>
           </a:p>
@@ -16335,7 +16652,7 @@
                 <a:ea typeface="Times New Roman" pitchFamily="34" charset="-122"/>
                 <a:cs typeface="Times New Roman" pitchFamily="34" charset="-120"/>
               </a:rPr>
-              <a:t>Find the names of three food products imported into Cameroon from temperate countries (for example wheat flour, milk or apples).</a:t>
+              <a:t>Why is the chernozem good for wheat?</a:t>
             </a:r>
             <a:endParaRPr lang="en-US" sz="4000" dirty="0"/>
           </a:p>
@@ -16447,7 +16764,7 @@
                 <a:ea typeface="Calibri" pitchFamily="34" charset="-122"/>
                 <a:cs typeface="Calibri" pitchFamily="34" charset="-120"/>
               </a:rPr>
-              <a:t>NEXT LESSON</a:t>
+              <a:t>FORMATIVE EVALUATION</a:t>
             </a:r>
             <a:endParaRPr lang="en-US" sz="1400" dirty="0"/>
           </a:p>
@@ -16512,7 +16829,7 @@
                 <a:ea typeface="Times New Roman" pitchFamily="34" charset="-122"/>
                 <a:cs typeface="Times New Roman" pitchFamily="34" charset="-120"/>
               </a:rPr>
-              <a:t>Next Lesson</a:t>
+              <a:t>Expected Answer</a:t>
             </a:r>
             <a:endParaRPr lang="en-US" sz="3600" dirty="0"/>
           </a:p>
@@ -16536,17 +16853,17 @@
           <a:ln/>
         </p:spPr>
         <p:txBody>
-          <a:bodyPr wrap="square" lIns="0" tIns="0" rIns="0" bIns="0" rtlCol="0" anchor="ctr"/>
-          <a:lstStyle/>
-          <a:p>
-            <a:pPr algn="ctr" indent="0" marL="0">
+          <a:bodyPr wrap="square" lIns="0" tIns="0" rIns="0" bIns="0" rtlCol="0" anchor="t"/>
+          <a:lstStyle/>
+          <a:p>
+            <a:pPr algn="l" indent="0" marL="0">
               <a:spcAft>
                 <a:spcPts val="800"/>
               </a:spcAft>
               <a:buNone/>
             </a:pPr>
             <a:r>
-              <a:rPr lang="en-US" sz="4000" b="1" dirty="0">
+              <a:rPr lang="en-US" sz="4000" dirty="0">
                 <a:solidFill>
                   <a:srgbClr val="111111"/>
                 </a:solidFill>
@@ -16554,27 +16871,7 @@
                 <a:ea typeface="Times New Roman" pitchFamily="34" charset="-122"/>
                 <a:cs typeface="Times New Roman" pitchFamily="34" charset="-120"/>
               </a:rPr>
-              <a:t>Our next lesson will be on:</a:t>
-            </a:r>
-            <a:endParaRPr lang="en-US" sz="4000" dirty="0"/>
-          </a:p>
-          <a:p>
-            <a:pPr algn="ctr" indent="0" marL="0">
-              <a:spcAft>
-                <a:spcPts val="800"/>
-              </a:spcAft>
-              <a:buNone/>
-            </a:pPr>
-            <a:r>
-              <a:rPr lang="en-US" sz="4000" b="1" dirty="0">
-                <a:solidFill>
-                  <a:srgbClr val="990011"/>
-                </a:solidFill>
-                <a:latin typeface="Times New Roman" pitchFamily="34" charset="0"/>
-                <a:ea typeface="Times New Roman" pitchFamily="34" charset="-122"/>
-                <a:cs typeface="Times New Roman" pitchFamily="34" charset="-120"/>
-              </a:rPr>
-              <a:t>Lesson 4 (Part 3): The Temperate Region: Human Activities (Farming)</a:t>
+              <a:t>It is black and full of humus, so it is very fertile.</a:t>
             </a:r>
             <a:endParaRPr lang="en-US" sz="4000" dirty="0"/>
           </a:p>
@@ -16686,6 +16983,968 @@
                 <a:ea typeface="Calibri" pitchFamily="34" charset="-122"/>
                 <a:cs typeface="Calibri" pitchFamily="34" charset="-120"/>
               </a:rPr>
+              <a:t>REMEDIATION</a:t>
+            </a:r>
+            <a:endParaRPr lang="en-US" sz="1400" dirty="0"/>
+          </a:p>
+        </p:txBody>
+      </p:sp>
+      <p:pic>
+        <p:nvPicPr>
+          <p:cNvPr id="3" name="Image 0" descr="/home/claude/f4/img/minesec_sheet.png">    </p:cNvPr>
+          <p:cNvPicPr>
+            <a:picLocks noChangeAspect="1"/>
+          </p:cNvPicPr>
+          <p:nvPr/>
+        </p:nvPicPr>
+        <p:blipFill>
+          <a:blip r:embed="rId1"/>
+          <a:stretch>
+            <a:fillRect/>
+          </a:stretch>
+        </p:blipFill>
+        <p:spPr>
+          <a:xfrm>
+            <a:off x="0" y="658368"/>
+            <a:ext cx="3840480" cy="5833872"/>
+          </a:xfrm>
+          <a:prstGeom prst="rect">
+            <a:avLst/>
+          </a:prstGeom>
+        </p:spPr>
+      </p:pic>
+      <p:sp>
+        <p:nvSpPr>
+          <p:cNvPr id="4" name="Text 1"/>
+          <p:cNvSpPr/>
+          <p:nvPr/>
+        </p:nvSpPr>
+        <p:spPr>
+          <a:xfrm>
+            <a:off x="4069080" y="1005840"/>
+            <a:ext cx="7802575" cy="731520"/>
+          </a:xfrm>
+          <a:prstGeom prst="rect">
+            <a:avLst/>
+          </a:prstGeom>
+          <a:noFill/>
+          <a:ln/>
+        </p:spPr>
+        <p:txBody>
+          <a:bodyPr wrap="square" lIns="0" tIns="0" rIns="0" bIns="0" rtlCol="0" anchor="ctr">
+            <a:normAutofit/>
+          </a:bodyPr>
+          <a:lstStyle/>
+          <a:p>
+            <a:pPr algn="ctr" indent="0" marL="0">
+              <a:buNone/>
+            </a:pPr>
+            <a:r>
+              <a:rPr lang="en-US" sz="3600" b="1" dirty="0">
+                <a:solidFill>
+                  <a:srgbClr val="990011"/>
+                </a:solidFill>
+                <a:latin typeface="Times New Roman" pitchFamily="34" charset="0"/>
+                <a:ea typeface="Times New Roman" pitchFamily="34" charset="-122"/>
+                <a:cs typeface="Times New Roman" pitchFamily="34" charset="-120"/>
+              </a:rPr>
+              <a:t>Remediation</a:t>
+            </a:r>
+            <a:endParaRPr lang="en-US" sz="3600" dirty="0"/>
+          </a:p>
+        </p:txBody>
+      </p:sp>
+      <p:sp>
+        <p:nvSpPr>
+          <p:cNvPr id="5" name="Text 2"/>
+          <p:cNvSpPr/>
+          <p:nvPr/>
+        </p:nvSpPr>
+        <p:spPr>
+          <a:xfrm>
+            <a:off x="4069080" y="1783080"/>
+            <a:ext cx="7802575" cy="4663440"/>
+          </a:xfrm>
+          <a:prstGeom prst="rect">
+            <a:avLst/>
+          </a:prstGeom>
+          <a:noFill/>
+          <a:ln/>
+        </p:spPr>
+        <p:txBody>
+          <a:bodyPr wrap="square" lIns="0" tIns="0" rIns="0" bIns="0" rtlCol="0" anchor="t"/>
+          <a:lstStyle/>
+          <a:p>
+            <a:pPr algn="l" indent="0" marL="0">
+              <a:spcAft>
+                <a:spcPts val="800"/>
+              </a:spcAft>
+              <a:buNone/>
+            </a:pPr>
+            <a:r>
+              <a:rPr lang="en-US" sz="4000" b="1" dirty="0">
+                <a:solidFill>
+                  <a:srgbClr val="111111"/>
+                </a:solidFill>
+                <a:latin typeface="Times New Roman" pitchFamily="34" charset="0"/>
+                <a:ea typeface="Times New Roman" pitchFamily="34" charset="-122"/>
+                <a:cs typeface="Times New Roman" pitchFamily="34" charset="-120"/>
+              </a:rPr>
+              <a:t>Fill in the blanks:</a:t>
+            </a:r>
+            <a:endParaRPr lang="en-US" sz="4000" dirty="0"/>
+          </a:p>
+          <a:p>
+            <a:pPr algn="l" marL="342900" indent="-342900">
+              <a:spcAft>
+                <a:spcPts val="800"/>
+              </a:spcAft>
+              <a:buSzPct val="100000"/>
+              <a:buFont typeface="+mj-lt"/>
+              <a:buAutoNum type="arabicPeriod" startAt="1"/>
+            </a:pPr>
+            <a:r>
+              <a:rPr lang="en-US" sz="4000" dirty="0">
+                <a:solidFill>
+                  <a:srgbClr val="111111"/>
+                </a:solidFill>
+                <a:latin typeface="Times New Roman" pitchFamily="34" charset="0"/>
+                <a:ea typeface="Times New Roman" pitchFamily="34" charset="-122"/>
+                <a:cs typeface="Times New Roman" pitchFamily="34" charset="-120"/>
+              </a:rPr>
+              <a:t>Trees that lose their leaves in autumn form a ______ forest.</a:t>
+            </a:r>
+            <a:endParaRPr lang="en-US" sz="4000" dirty="0"/>
+          </a:p>
+          <a:p>
+            <a:pPr algn="l" marL="342900" indent="-342900">
+              <a:spcAft>
+                <a:spcPts val="800"/>
+              </a:spcAft>
+              <a:buSzPct val="100000"/>
+              <a:buFont typeface="+mj-lt"/>
+              <a:buAutoNum type="arabicPeriod" startAt="1"/>
+            </a:pPr>
+            <a:r>
+              <a:rPr lang="en-US" sz="4000" dirty="0">
+                <a:solidFill>
+                  <a:srgbClr val="111111"/>
+                </a:solidFill>
+                <a:latin typeface="Times New Roman" pitchFamily="34" charset="0"/>
+                <a:ea typeface="Times New Roman" pitchFamily="34" charset="-122"/>
+                <a:cs typeface="Times New Roman" pitchFamily="34" charset="-120"/>
+              </a:rPr>
+              <a:t>Pine trees have ______ leaves.</a:t>
+            </a:r>
+            <a:endParaRPr lang="en-US" sz="4000" dirty="0"/>
+          </a:p>
+          <a:p>
+            <a:pPr algn="l" marL="342900" indent="-342900">
+              <a:spcAft>
+                <a:spcPts val="800"/>
+              </a:spcAft>
+              <a:buSzPct val="100000"/>
+              <a:buFont typeface="+mj-lt"/>
+              <a:buAutoNum type="arabicPeriod" startAt="1"/>
+            </a:pPr>
+            <a:r>
+              <a:rPr lang="en-US" sz="4000" dirty="0">
+                <a:solidFill>
+                  <a:srgbClr val="111111"/>
+                </a:solidFill>
+                <a:latin typeface="Times New Roman" pitchFamily="34" charset="0"/>
+                <a:ea typeface="Times New Roman" pitchFamily="34" charset="-122"/>
+                <a:cs typeface="Times New Roman" pitchFamily="34" charset="-120"/>
+              </a:rPr>
+              <a:t>The black, rich soil of grasslands is the ______.</a:t>
+            </a:r>
+            <a:endParaRPr lang="en-US" sz="4000" dirty="0"/>
+          </a:p>
+        </p:txBody>
+      </p:sp>
+      <p:sp>
+        <p:nvSpPr>
+          <p:cNvPr id="25" name="Slide Number Placeholder 0"/>
+          <p:cNvSpPr>
+            <a:spLocks noGrp="1"/>
+          </p:cNvSpPr>
+          <p:nvPr>
+            <p:ph type="sldNum" sz="quarter" idx="4294967295"/>
+          </p:nvPr>
+        </p:nvSpPr>
+        <p:spPr>
+          <a:xfrm>
+            <a:off x="27432" y="91440"/>
+            <a:ext cx="585216" cy="475488"/>
+          </a:xfrm>
+          <a:prstGeom prst="rect">
+            <a:avLst/>
+          </a:prstGeom>
+          <a:extLst>
+            <a:ext uri="{C572A759-6A51-4108-AA02-DFA0A04FC94B}">
+              <ma14:wrappingTextBoxFlag xmlns:ma14="http://schemas.microsoft.com/office/mac/drawingml/2011/main" val="0"/>
+            </a:ext>
+          </a:extLst>
+        </p:spPr>
+        <p:txBody>
+          <a:bodyPr/>
+          <a:lstStyle>
+            <a:lvl1pPr>
+              <a:defRPr sz="2000">
+                <a:solidFill>
+                  <a:srgbClr val="FFFFFF"/>
+                </a:solidFill>
+                <a:latin typeface="Calibri"/>
+                <a:ea typeface="Calibri"/>
+                <a:cs typeface="Calibri"/>
+              </a:defRPr>
+            </a:lvl1pPr>
+          </a:lstStyle>
+          <a:p>
+            <a:pPr algn="ctr"/>
+            <a:fld id="{F7021451-1387-4CA6-816F-3879F97B5CBC}" type="slidenum">
+              <a:rPr b="1" lang="en-US"/>
+              <a:t>47</a:t>
+            </a:fld>
+            <a:endParaRPr lang="en-US"/>
+          </a:p>
+        </p:txBody>
+      </p:sp>
+    </p:spTree>
+  </p:cSld>
+  <p:clrMapOvr>
+    <a:masterClrMapping/>
+  </p:clrMapOvr>
+</p:sld>
+</file>
+
+<file path=ppt/slides/slide48.xml><?xml version="1.0" encoding="utf-8"?>
+<p:sld xmlns:a="http://schemas.openxmlformats.org/drawingml/2006/main" xmlns:r="http://schemas.openxmlformats.org/officeDocument/2006/relationships" xmlns:p="http://schemas.openxmlformats.org/presentationml/2006/main">
+  <p:cSld name="Slide 48">
+    <p:spTree>
+      <p:nvGrpSpPr>
+        <p:cNvPr id="1" name=""/>
+        <p:cNvGrpSpPr/>
+        <p:nvPr/>
+      </p:nvGrpSpPr>
+      <p:grpSpPr>
+        <a:xfrm>
+          <a:off x="0" y="0"/>
+          <a:ext cx="0" cy="0"/>
+          <a:chOff x="0" y="0"/>
+          <a:chExt cx="0" cy="0"/>
+        </a:xfrm>
+      </p:grpSpPr>
+      <p:sp>
+        <p:nvSpPr>
+          <p:cNvPr id="2" name="Text 0"/>
+          <p:cNvSpPr/>
+          <p:nvPr/>
+        </p:nvSpPr>
+        <p:spPr>
+          <a:xfrm>
+            <a:off x="457200" y="713232"/>
+            <a:ext cx="11368735" cy="274320"/>
+          </a:xfrm>
+          <a:prstGeom prst="rect">
+            <a:avLst/>
+          </a:prstGeom>
+          <a:noFill/>
+          <a:ln/>
+        </p:spPr>
+        <p:txBody>
+          <a:bodyPr wrap="square" lIns="0" tIns="0" rIns="0" bIns="0" rtlCol="0" anchor="ctr"/>
+          <a:lstStyle/>
+          <a:p>
+            <a:pPr algn="r" indent="0" marL="0">
+              <a:buNone/>
+            </a:pPr>
+            <a:r>
+              <a:rPr lang="en-US" sz="1400" b="1" dirty="0">
+                <a:solidFill>
+                  <a:srgbClr val="1C3F6E"/>
+                </a:solidFill>
+                <a:latin typeface="Calibri" pitchFamily="34" charset="0"/>
+                <a:ea typeface="Calibri" pitchFamily="34" charset="-122"/>
+                <a:cs typeface="Calibri" pitchFamily="34" charset="-120"/>
+              </a:rPr>
+              <a:t>HOMEWORK</a:t>
+            </a:r>
+            <a:endParaRPr lang="en-US" sz="1400" dirty="0"/>
+          </a:p>
+        </p:txBody>
+      </p:sp>
+      <p:pic>
+        <p:nvPicPr>
+          <p:cNvPr id="3" name="Image 0" descr="/home/claude/f4/img/minesec_sheet.png">    </p:cNvPr>
+          <p:cNvPicPr>
+            <a:picLocks noChangeAspect="1"/>
+          </p:cNvPicPr>
+          <p:nvPr/>
+        </p:nvPicPr>
+        <p:blipFill>
+          <a:blip r:embed="rId1"/>
+          <a:stretch>
+            <a:fillRect/>
+          </a:stretch>
+        </p:blipFill>
+        <p:spPr>
+          <a:xfrm>
+            <a:off x="0" y="658368"/>
+            <a:ext cx="5120640" cy="5833872"/>
+          </a:xfrm>
+          <a:prstGeom prst="rect">
+            <a:avLst/>
+          </a:prstGeom>
+        </p:spPr>
+      </p:pic>
+      <p:sp>
+        <p:nvSpPr>
+          <p:cNvPr id="4" name="Text 1"/>
+          <p:cNvSpPr/>
+          <p:nvPr/>
+        </p:nvSpPr>
+        <p:spPr>
+          <a:xfrm>
+            <a:off x="5349240" y="1005840"/>
+            <a:ext cx="6522415" cy="731520"/>
+          </a:xfrm>
+          <a:prstGeom prst="rect">
+            <a:avLst/>
+          </a:prstGeom>
+          <a:noFill/>
+          <a:ln/>
+        </p:spPr>
+        <p:txBody>
+          <a:bodyPr wrap="square" lIns="0" tIns="0" rIns="0" bIns="0" rtlCol="0" anchor="ctr">
+            <a:normAutofit/>
+          </a:bodyPr>
+          <a:lstStyle/>
+          <a:p>
+            <a:pPr algn="ctr" indent="0" marL="0">
+              <a:buNone/>
+            </a:pPr>
+            <a:r>
+              <a:rPr lang="en-US" sz="3600" b="1" dirty="0">
+                <a:solidFill>
+                  <a:srgbClr val="990011"/>
+                </a:solidFill>
+                <a:latin typeface="Times New Roman" pitchFamily="34" charset="0"/>
+                <a:ea typeface="Times New Roman" pitchFamily="34" charset="-122"/>
+                <a:cs typeface="Times New Roman" pitchFamily="34" charset="-120"/>
+              </a:rPr>
+              <a:t>Homework</a:t>
+            </a:r>
+            <a:endParaRPr lang="en-US" sz="3600" dirty="0"/>
+          </a:p>
+        </p:txBody>
+      </p:sp>
+      <p:sp>
+        <p:nvSpPr>
+          <p:cNvPr id="5" name="Text 2"/>
+          <p:cNvSpPr/>
+          <p:nvPr/>
+        </p:nvSpPr>
+        <p:spPr>
+          <a:xfrm>
+            <a:off x="5349240" y="1783080"/>
+            <a:ext cx="6522415" cy="4663440"/>
+          </a:xfrm>
+          <a:prstGeom prst="rect">
+            <a:avLst/>
+          </a:prstGeom>
+          <a:noFill/>
+          <a:ln/>
+        </p:spPr>
+        <p:txBody>
+          <a:bodyPr wrap="square" lIns="0" tIns="0" rIns="0" bIns="0" rtlCol="0" anchor="t"/>
+          <a:lstStyle/>
+          <a:p>
+            <a:pPr algn="l" indent="0" marL="0">
+              <a:spcAft>
+                <a:spcPts val="800"/>
+              </a:spcAft>
+              <a:buNone/>
+            </a:pPr>
+            <a:r>
+              <a:rPr lang="en-US" sz="4000" dirty="0">
+                <a:solidFill>
+                  <a:srgbClr val="111111"/>
+                </a:solidFill>
+                <a:latin typeface="Times New Roman" pitchFamily="34" charset="0"/>
+                <a:ea typeface="Times New Roman" pitchFamily="34" charset="-122"/>
+                <a:cs typeface="Times New Roman" pitchFamily="34" charset="-120"/>
+              </a:rPr>
+              <a:t>Find the names of three food products imported into Cameroon from temperate countries (for example wheat flour, milk or apples).</a:t>
+            </a:r>
+            <a:endParaRPr lang="en-US" sz="4000" dirty="0"/>
+          </a:p>
+        </p:txBody>
+      </p:sp>
+      <p:sp>
+        <p:nvSpPr>
+          <p:cNvPr id="25" name="Slide Number Placeholder 0"/>
+          <p:cNvSpPr>
+            <a:spLocks noGrp="1"/>
+          </p:cNvSpPr>
+          <p:nvPr>
+            <p:ph type="sldNum" sz="quarter" idx="4294967295"/>
+          </p:nvPr>
+        </p:nvSpPr>
+        <p:spPr>
+          <a:xfrm>
+            <a:off x="27432" y="91440"/>
+            <a:ext cx="585216" cy="475488"/>
+          </a:xfrm>
+          <a:prstGeom prst="rect">
+            <a:avLst/>
+          </a:prstGeom>
+          <a:extLst>
+            <a:ext uri="{C572A759-6A51-4108-AA02-DFA0A04FC94B}">
+              <ma14:wrappingTextBoxFlag xmlns:ma14="http://schemas.microsoft.com/office/mac/drawingml/2011/main" val="0"/>
+            </a:ext>
+          </a:extLst>
+        </p:spPr>
+        <p:txBody>
+          <a:bodyPr/>
+          <a:lstStyle>
+            <a:lvl1pPr>
+              <a:defRPr sz="2000">
+                <a:solidFill>
+                  <a:srgbClr val="FFFFFF"/>
+                </a:solidFill>
+                <a:latin typeface="Calibri"/>
+                <a:ea typeface="Calibri"/>
+                <a:cs typeface="Calibri"/>
+              </a:defRPr>
+            </a:lvl1pPr>
+          </a:lstStyle>
+          <a:p>
+            <a:pPr algn="ctr"/>
+            <a:fld id="{F7021451-1387-4CA6-816F-3879F97B5CBC}" type="slidenum">
+              <a:rPr b="1" lang="en-US"/>
+              <a:t>48</a:t>
+            </a:fld>
+            <a:endParaRPr lang="en-US"/>
+          </a:p>
+        </p:txBody>
+      </p:sp>
+    </p:spTree>
+  </p:cSld>
+  <p:clrMapOvr>
+    <a:masterClrMapping/>
+  </p:clrMapOvr>
+</p:sld>
+</file>
+
+<file path=ppt/slides/slide49.xml><?xml version="1.0" encoding="utf-8"?>
+<p:sld xmlns:a="http://schemas.openxmlformats.org/drawingml/2006/main" xmlns:r="http://schemas.openxmlformats.org/officeDocument/2006/relationships" xmlns:p="http://schemas.openxmlformats.org/presentationml/2006/main">
+  <p:cSld name="Slide 49">
+    <p:spTree>
+      <p:nvGrpSpPr>
+        <p:cNvPr id="1" name=""/>
+        <p:cNvGrpSpPr/>
+        <p:nvPr/>
+      </p:nvGrpSpPr>
+      <p:grpSpPr>
+        <a:xfrm>
+          <a:off x="0" y="0"/>
+          <a:ext cx="0" cy="0"/>
+          <a:chOff x="0" y="0"/>
+          <a:chExt cx="0" cy="0"/>
+        </a:xfrm>
+      </p:grpSpPr>
+      <p:sp>
+        <p:nvSpPr>
+          <p:cNvPr id="2" name="Text 0"/>
+          <p:cNvSpPr/>
+          <p:nvPr/>
+        </p:nvSpPr>
+        <p:spPr>
+          <a:xfrm>
+            <a:off x="457200" y="713232"/>
+            <a:ext cx="11368735" cy="274320"/>
+          </a:xfrm>
+          <a:prstGeom prst="rect">
+            <a:avLst/>
+          </a:prstGeom>
+          <a:noFill/>
+          <a:ln/>
+        </p:spPr>
+        <p:txBody>
+          <a:bodyPr wrap="square" lIns="0" tIns="0" rIns="0" bIns="0" rtlCol="0" anchor="ctr"/>
+          <a:lstStyle/>
+          <a:p>
+            <a:pPr algn="r" indent="0" marL="0">
+              <a:buNone/>
+            </a:pPr>
+            <a:r>
+              <a:rPr lang="en-US" sz="1400" b="1" dirty="0">
+                <a:solidFill>
+                  <a:srgbClr val="1C3F6E"/>
+                </a:solidFill>
+                <a:latin typeface="Calibri" pitchFamily="34" charset="0"/>
+                <a:ea typeface="Calibri" pitchFamily="34" charset="-122"/>
+                <a:cs typeface="Calibri" pitchFamily="34" charset="-120"/>
+              </a:rPr>
+              <a:t>NEXT LESSON</a:t>
+            </a:r>
+            <a:endParaRPr lang="en-US" sz="1400" dirty="0"/>
+          </a:p>
+        </p:txBody>
+      </p:sp>
+      <p:pic>
+        <p:nvPicPr>
+          <p:cNvPr id="3" name="Image 0" descr="/home/claude/f4/img/minesec_sheet.png">    </p:cNvPr>
+          <p:cNvPicPr>
+            <a:picLocks noChangeAspect="1"/>
+          </p:cNvPicPr>
+          <p:nvPr/>
+        </p:nvPicPr>
+        <p:blipFill>
+          <a:blip r:embed="rId1"/>
+          <a:stretch>
+            <a:fillRect/>
+          </a:stretch>
+        </p:blipFill>
+        <p:spPr>
+          <a:xfrm>
+            <a:off x="0" y="658368"/>
+            <a:ext cx="5120640" cy="5833872"/>
+          </a:xfrm>
+          <a:prstGeom prst="rect">
+            <a:avLst/>
+          </a:prstGeom>
+        </p:spPr>
+      </p:pic>
+      <p:sp>
+        <p:nvSpPr>
+          <p:cNvPr id="4" name="Text 1"/>
+          <p:cNvSpPr/>
+          <p:nvPr/>
+        </p:nvSpPr>
+        <p:spPr>
+          <a:xfrm>
+            <a:off x="5349240" y="1005840"/>
+            <a:ext cx="6522415" cy="731520"/>
+          </a:xfrm>
+          <a:prstGeom prst="rect">
+            <a:avLst/>
+          </a:prstGeom>
+          <a:noFill/>
+          <a:ln/>
+        </p:spPr>
+        <p:txBody>
+          <a:bodyPr wrap="square" lIns="0" tIns="0" rIns="0" bIns="0" rtlCol="0" anchor="ctr">
+            <a:normAutofit/>
+          </a:bodyPr>
+          <a:lstStyle/>
+          <a:p>
+            <a:pPr algn="ctr" indent="0" marL="0">
+              <a:buNone/>
+            </a:pPr>
+            <a:r>
+              <a:rPr lang="en-US" sz="3600" b="1" dirty="0">
+                <a:solidFill>
+                  <a:srgbClr val="990011"/>
+                </a:solidFill>
+                <a:latin typeface="Times New Roman" pitchFamily="34" charset="0"/>
+                <a:ea typeface="Times New Roman" pitchFamily="34" charset="-122"/>
+                <a:cs typeface="Times New Roman" pitchFamily="34" charset="-120"/>
+              </a:rPr>
+              <a:t>Next Lesson</a:t>
+            </a:r>
+            <a:endParaRPr lang="en-US" sz="3600" dirty="0"/>
+          </a:p>
+        </p:txBody>
+      </p:sp>
+      <p:sp>
+        <p:nvSpPr>
+          <p:cNvPr id="5" name="Text 2"/>
+          <p:cNvSpPr/>
+          <p:nvPr/>
+        </p:nvSpPr>
+        <p:spPr>
+          <a:xfrm>
+            <a:off x="5349240" y="1783080"/>
+            <a:ext cx="6522415" cy="4663440"/>
+          </a:xfrm>
+          <a:prstGeom prst="rect">
+            <a:avLst/>
+          </a:prstGeom>
+          <a:noFill/>
+          <a:ln/>
+        </p:spPr>
+        <p:txBody>
+          <a:bodyPr wrap="square" lIns="0" tIns="0" rIns="0" bIns="0" rtlCol="0" anchor="ctr"/>
+          <a:lstStyle/>
+          <a:p>
+            <a:pPr algn="ctr" indent="0" marL="0">
+              <a:spcAft>
+                <a:spcPts val="800"/>
+              </a:spcAft>
+              <a:buNone/>
+            </a:pPr>
+            <a:r>
+              <a:rPr lang="en-US" sz="4000" b="1" dirty="0">
+                <a:solidFill>
+                  <a:srgbClr val="111111"/>
+                </a:solidFill>
+                <a:latin typeface="Times New Roman" pitchFamily="34" charset="0"/>
+                <a:ea typeface="Times New Roman" pitchFamily="34" charset="-122"/>
+                <a:cs typeface="Times New Roman" pitchFamily="34" charset="-120"/>
+              </a:rPr>
+              <a:t>Our next lesson will be on:</a:t>
+            </a:r>
+            <a:endParaRPr lang="en-US" sz="4000" dirty="0"/>
+          </a:p>
+          <a:p>
+            <a:pPr algn="ctr" indent="0" marL="0">
+              <a:spcAft>
+                <a:spcPts val="800"/>
+              </a:spcAft>
+              <a:buNone/>
+            </a:pPr>
+            <a:r>
+              <a:rPr lang="en-US" sz="4000" b="1" dirty="0">
+                <a:solidFill>
+                  <a:srgbClr val="990011"/>
+                </a:solidFill>
+                <a:latin typeface="Times New Roman" pitchFamily="34" charset="0"/>
+                <a:ea typeface="Times New Roman" pitchFamily="34" charset="-122"/>
+                <a:cs typeface="Times New Roman" pitchFamily="34" charset="-120"/>
+              </a:rPr>
+              <a:t>Lesson 4 (Part 3): The Temperate Region: Human Activities (Farming)</a:t>
+            </a:r>
+            <a:endParaRPr lang="en-US" sz="4000" dirty="0"/>
+          </a:p>
+        </p:txBody>
+      </p:sp>
+      <p:sp>
+        <p:nvSpPr>
+          <p:cNvPr id="25" name="Slide Number Placeholder 0"/>
+          <p:cNvSpPr>
+            <a:spLocks noGrp="1"/>
+          </p:cNvSpPr>
+          <p:nvPr>
+            <p:ph type="sldNum" sz="quarter" idx="4294967295"/>
+          </p:nvPr>
+        </p:nvSpPr>
+        <p:spPr>
+          <a:xfrm>
+            <a:off x="27432" y="91440"/>
+            <a:ext cx="585216" cy="475488"/>
+          </a:xfrm>
+          <a:prstGeom prst="rect">
+            <a:avLst/>
+          </a:prstGeom>
+          <a:extLst>
+            <a:ext uri="{C572A759-6A51-4108-AA02-DFA0A04FC94B}">
+              <ma14:wrappingTextBoxFlag xmlns:ma14="http://schemas.microsoft.com/office/mac/drawingml/2011/main" val="0"/>
+            </a:ext>
+          </a:extLst>
+        </p:spPr>
+        <p:txBody>
+          <a:bodyPr/>
+          <a:lstStyle>
+            <a:lvl1pPr>
+              <a:defRPr sz="2000">
+                <a:solidFill>
+                  <a:srgbClr val="FFFFFF"/>
+                </a:solidFill>
+                <a:latin typeface="Calibri"/>
+                <a:ea typeface="Calibri"/>
+                <a:cs typeface="Calibri"/>
+              </a:defRPr>
+            </a:lvl1pPr>
+          </a:lstStyle>
+          <a:p>
+            <a:pPr algn="ctr"/>
+            <a:fld id="{F7021451-1387-4CA6-816F-3879F97B5CBC}" type="slidenum">
+              <a:rPr b="1" lang="en-US"/>
+              <a:t>49</a:t>
+            </a:fld>
+            <a:endParaRPr lang="en-US"/>
+          </a:p>
+        </p:txBody>
+      </p:sp>
+    </p:spTree>
+  </p:cSld>
+  <p:clrMapOvr>
+    <a:masterClrMapping/>
+  </p:clrMapOvr>
+</p:sld>
+</file>
+
+<file path=ppt/slides/slide5.xml><?xml version="1.0" encoding="utf-8"?>
+<p:sld xmlns:a="http://schemas.openxmlformats.org/drawingml/2006/main" xmlns:r="http://schemas.openxmlformats.org/officeDocument/2006/relationships" xmlns:p="http://schemas.openxmlformats.org/presentationml/2006/main">
+  <p:cSld name="Slide 5">
+    <p:spTree>
+      <p:nvGrpSpPr>
+        <p:cNvPr id="1" name=""/>
+        <p:cNvGrpSpPr/>
+        <p:nvPr/>
+      </p:nvGrpSpPr>
+      <p:grpSpPr>
+        <a:xfrm>
+          <a:off x="0" y="0"/>
+          <a:ext cx="0" cy="0"/>
+          <a:chOff x="0" y="0"/>
+          <a:chExt cx="0" cy="0"/>
+        </a:xfrm>
+      </p:grpSpPr>
+      <p:sp>
+        <p:nvSpPr>
+          <p:cNvPr id="2" name="Text 0"/>
+          <p:cNvSpPr/>
+          <p:nvPr/>
+        </p:nvSpPr>
+        <p:spPr>
+          <a:xfrm>
+            <a:off x="457200" y="713232"/>
+            <a:ext cx="11368735" cy="274320"/>
+          </a:xfrm>
+          <a:prstGeom prst="rect">
+            <a:avLst/>
+          </a:prstGeom>
+          <a:noFill/>
+          <a:ln/>
+        </p:spPr>
+        <p:txBody>
+          <a:bodyPr wrap="square" lIns="0" tIns="0" rIns="0" bIns="0" rtlCol="0" anchor="ctr"/>
+          <a:lstStyle/>
+          <a:p>
+            <a:pPr algn="r" indent="0" marL="0">
+              <a:buNone/>
+            </a:pPr>
+            <a:r>
+              <a:rPr lang="en-US" sz="1400" b="1" dirty="0">
+                <a:solidFill>
+                  <a:srgbClr val="1C3F6E"/>
+                </a:solidFill>
+                <a:latin typeface="Calibri" pitchFamily="34" charset="0"/>
+                <a:ea typeface="Calibri" pitchFamily="34" charset="-122"/>
+                <a:cs typeface="Calibri" pitchFamily="34" charset="-120"/>
+              </a:rPr>
+              <a:t>HOMEWORK CORRECTION</a:t>
+            </a:r>
+            <a:endParaRPr lang="en-US" sz="1400" dirty="0"/>
+          </a:p>
+        </p:txBody>
+      </p:sp>
+      <p:pic>
+        <p:nvPicPr>
+          <p:cNvPr id="3" name="Image 0" descr="/home/claude/f4/img/minesec_sheet.png">    </p:cNvPr>
+          <p:cNvPicPr>
+            <a:picLocks noChangeAspect="1"/>
+          </p:cNvPicPr>
+          <p:nvPr/>
+        </p:nvPicPr>
+        <p:blipFill>
+          <a:blip r:embed="rId1"/>
+          <a:stretch>
+            <a:fillRect/>
+          </a:stretch>
+        </p:blipFill>
+        <p:spPr>
+          <a:xfrm>
+            <a:off x="0" y="658368"/>
+            <a:ext cx="5120640" cy="5833872"/>
+          </a:xfrm>
+          <a:prstGeom prst="rect">
+            <a:avLst/>
+          </a:prstGeom>
+        </p:spPr>
+      </p:pic>
+      <p:sp>
+        <p:nvSpPr>
+          <p:cNvPr id="4" name="Text 1"/>
+          <p:cNvSpPr/>
+          <p:nvPr/>
+        </p:nvSpPr>
+        <p:spPr>
+          <a:xfrm>
+            <a:off x="5349240" y="1005840"/>
+            <a:ext cx="6522415" cy="731520"/>
+          </a:xfrm>
+          <a:prstGeom prst="rect">
+            <a:avLst/>
+          </a:prstGeom>
+          <a:noFill/>
+          <a:ln/>
+        </p:spPr>
+        <p:txBody>
+          <a:bodyPr wrap="square" lIns="0" tIns="0" rIns="0" bIns="0" rtlCol="0" anchor="ctr">
+            <a:normAutofit/>
+          </a:bodyPr>
+          <a:lstStyle/>
+          <a:p>
+            <a:pPr algn="ctr" indent="0" marL="0">
+              <a:buNone/>
+            </a:pPr>
+            <a:r>
+              <a:rPr lang="en-US" sz="3600" b="1" dirty="0">
+                <a:solidFill>
+                  <a:srgbClr val="990011"/>
+                </a:solidFill>
+                <a:latin typeface="Times New Roman" pitchFamily="34" charset="0"/>
+                <a:ea typeface="Times New Roman" pitchFamily="34" charset="-122"/>
+                <a:cs typeface="Times New Roman" pitchFamily="34" charset="-120"/>
+              </a:rPr>
+              <a:t>Correction: Possible Answer</a:t>
+            </a:r>
+            <a:endParaRPr lang="en-US" sz="3600" dirty="0"/>
+          </a:p>
+        </p:txBody>
+      </p:sp>
+      <p:sp>
+        <p:nvSpPr>
+          <p:cNvPr id="5" name="Text 2"/>
+          <p:cNvSpPr/>
+          <p:nvPr/>
+        </p:nvSpPr>
+        <p:spPr>
+          <a:xfrm>
+            <a:off x="5349240" y="1783080"/>
+            <a:ext cx="6522415" cy="4663440"/>
+          </a:xfrm>
+          <a:prstGeom prst="rect">
+            <a:avLst/>
+          </a:prstGeom>
+          <a:noFill/>
+          <a:ln/>
+        </p:spPr>
+        <p:txBody>
+          <a:bodyPr wrap="square" lIns="0" tIns="0" rIns="0" bIns="0" rtlCol="0" anchor="t"/>
+          <a:lstStyle/>
+          <a:p>
+            <a:pPr algn="l" indent="0" marL="0">
+              <a:spcAft>
+                <a:spcPts val="800"/>
+              </a:spcAft>
+              <a:buNone/>
+            </a:pPr>
+            <a:r>
+              <a:rPr lang="en-US" sz="4000" dirty="0">
+                <a:solidFill>
+                  <a:srgbClr val="111111"/>
+                </a:solidFill>
+                <a:latin typeface="Times New Roman" pitchFamily="34" charset="0"/>
+                <a:ea typeface="Times New Roman" pitchFamily="34" charset="-122"/>
+                <a:cs typeface="Times New Roman" pitchFamily="34" charset="-120"/>
+              </a:rPr>
+              <a:t>In autumn the leaves turn yellow, orange, red and brown; in winter they fall and the trees stand bare until spring.</a:t>
+            </a:r>
+            <a:endParaRPr lang="en-US" sz="4000" dirty="0"/>
+          </a:p>
+        </p:txBody>
+      </p:sp>
+      <p:sp>
+        <p:nvSpPr>
+          <p:cNvPr id="25" name="Slide Number Placeholder 0"/>
+          <p:cNvSpPr>
+            <a:spLocks noGrp="1"/>
+          </p:cNvSpPr>
+          <p:nvPr>
+            <p:ph type="sldNum" sz="quarter" idx="4294967295"/>
+          </p:nvPr>
+        </p:nvSpPr>
+        <p:spPr>
+          <a:xfrm>
+            <a:off x="27432" y="91440"/>
+            <a:ext cx="585216" cy="475488"/>
+          </a:xfrm>
+          <a:prstGeom prst="rect">
+            <a:avLst/>
+          </a:prstGeom>
+          <a:extLst>
+            <a:ext uri="{C572A759-6A51-4108-AA02-DFA0A04FC94B}">
+              <ma14:wrappingTextBoxFlag xmlns:ma14="http://schemas.microsoft.com/office/mac/drawingml/2011/main" val="0"/>
+            </a:ext>
+          </a:extLst>
+        </p:spPr>
+        <p:txBody>
+          <a:bodyPr/>
+          <a:lstStyle>
+            <a:lvl1pPr>
+              <a:defRPr sz="2000">
+                <a:solidFill>
+                  <a:srgbClr val="FFFFFF"/>
+                </a:solidFill>
+                <a:latin typeface="Calibri"/>
+                <a:ea typeface="Calibri"/>
+                <a:cs typeface="Calibri"/>
+              </a:defRPr>
+            </a:lvl1pPr>
+          </a:lstStyle>
+          <a:p>
+            <a:pPr algn="ctr"/>
+            <a:fld id="{F7021451-1387-4CA6-816F-3879F97B5CBC}" type="slidenum">
+              <a:rPr b="1" lang="en-US"/>
+              <a:t>5</a:t>
+            </a:fld>
+            <a:endParaRPr lang="en-US"/>
+          </a:p>
+        </p:txBody>
+      </p:sp>
+    </p:spTree>
+  </p:cSld>
+  <p:clrMapOvr>
+    <a:masterClrMapping/>
+  </p:clrMapOvr>
+</p:sld>
+</file>
+
+<file path=ppt/slides/slide50.xml><?xml version="1.0" encoding="utf-8"?>
+<p:sld xmlns:a="http://schemas.openxmlformats.org/drawingml/2006/main" xmlns:r="http://schemas.openxmlformats.org/officeDocument/2006/relationships" xmlns:p="http://schemas.openxmlformats.org/presentationml/2006/main">
+  <p:cSld name="Slide 50">
+    <p:spTree>
+      <p:nvGrpSpPr>
+        <p:cNvPr id="1" name=""/>
+        <p:cNvGrpSpPr/>
+        <p:nvPr/>
+      </p:nvGrpSpPr>
+      <p:grpSpPr>
+        <a:xfrm>
+          <a:off x="0" y="0"/>
+          <a:ext cx="0" cy="0"/>
+          <a:chOff x="0" y="0"/>
+          <a:chExt cx="0" cy="0"/>
+        </a:xfrm>
+      </p:grpSpPr>
+      <p:sp>
+        <p:nvSpPr>
+          <p:cNvPr id="2" name="Text 0"/>
+          <p:cNvSpPr/>
+          <p:nvPr/>
+        </p:nvSpPr>
+        <p:spPr>
+          <a:xfrm>
+            <a:off x="457200" y="713232"/>
+            <a:ext cx="11368735" cy="274320"/>
+          </a:xfrm>
+          <a:prstGeom prst="rect">
+            <a:avLst/>
+          </a:prstGeom>
+          <a:noFill/>
+          <a:ln/>
+        </p:spPr>
+        <p:txBody>
+          <a:bodyPr wrap="square" lIns="0" tIns="0" rIns="0" bIns="0" rtlCol="0" anchor="ctr"/>
+          <a:lstStyle/>
+          <a:p>
+            <a:pPr algn="r" indent="0" marL="0">
+              <a:buNone/>
+            </a:pPr>
+            <a:r>
+              <a:rPr lang="en-US" sz="1400" b="1" dirty="0">
+                <a:solidFill>
+                  <a:srgbClr val="1C3F6E"/>
+                </a:solidFill>
+                <a:latin typeface="Calibri" pitchFamily="34" charset="0"/>
+                <a:ea typeface="Calibri" pitchFamily="34" charset="-122"/>
+                <a:cs typeface="Calibri" pitchFamily="34" charset="-120"/>
+              </a:rPr>
               <a:t>BILINGUAL GAME</a:t>
             </a:r>
             <a:endParaRPr lang="en-US" sz="1400" dirty="0"/>
@@ -16733,7 +17992,7 @@
       </p:sp>
       <p:graphicFrame>
         <p:nvGraphicFramePr>
-          <p:cNvPr id="48" name="Table 0"/>
+          <p:cNvPr id="51" name="Table 0"/>
           <p:cNvGraphicFramePr>
             <a:graphicFrameLocks noGrp="1"/>
           </p:cNvGraphicFramePr>
@@ -18045,7 +19304,7 @@
             <a:pPr algn="ctr"/>
             <a:fld id="{F7021451-1387-4CA6-816F-3879F97B5CBC}" type="slidenum">
               <a:rPr b="1" lang="en-US"/>
-              <a:t>47</a:t>
+              <a:t>50</a:t>
             </a:fld>
             <a:endParaRPr lang="en-US"/>
           </a:p>
@@ -18059,9 +19318,9 @@
 </p:sld>
 </file>
 
-<file path=ppt/slides/slide48.xml><?xml version="1.0" encoding="utf-8"?>
+<file path=ppt/slides/slide51.xml><?xml version="1.0" encoding="utf-8"?>
 <p:sld xmlns:a="http://schemas.openxmlformats.org/drawingml/2006/main" xmlns:r="http://schemas.openxmlformats.org/officeDocument/2006/relationships" xmlns:p="http://schemas.openxmlformats.org/presentationml/2006/main">
-  <p:cSld name="Slide 48">
+  <p:cSld name="Slide 51">
     <p:spTree>
       <p:nvGrpSpPr>
         <p:cNvPr id="1" name=""/>
@@ -18156,7 +19415,7 @@
       </p:sp>
       <p:graphicFrame>
         <p:nvGraphicFramePr>
-          <p:cNvPr id="49" name="Table 0"/>
+          <p:cNvPr id="52" name="Table 0"/>
           <p:cNvGraphicFramePr>
             <a:graphicFrameLocks noGrp="1"/>
           </p:cNvGraphicFramePr>
@@ -18778,7 +20037,7 @@
             <a:pPr algn="ctr"/>
             <a:fld id="{F7021451-1387-4CA6-816F-3879F97B5CBC}" type="slidenum">
               <a:rPr b="1" lang="en-US"/>
-              <a:t>48</a:t>
+              <a:t>51</a:t>
             </a:fld>
             <a:endParaRPr lang="en-US"/>
           </a:p>
@@ -18792,9 +20051,9 @@
 </p:sld>
 </file>
 
-<file path=ppt/slides/slide49.xml><?xml version="1.0" encoding="utf-8"?>
+<file path=ppt/slides/slide52.xml><?xml version="1.0" encoding="utf-8"?>
 <p:sld xmlns:a="http://schemas.openxmlformats.org/drawingml/2006/main" xmlns:r="http://schemas.openxmlformats.org/officeDocument/2006/relationships" xmlns:p="http://schemas.openxmlformats.org/presentationml/2006/main">
-  <p:cSld name="Slide 49">
+  <p:cSld name="Slide 52">
     <p:spTree>
       <p:nvGrpSpPr>
         <p:cNvPr id="1" name=""/>
@@ -18889,7 +20148,7 @@
       </p:sp>
       <p:graphicFrame>
         <p:nvGraphicFramePr>
-          <p:cNvPr id="50" name="Table 0"/>
+          <p:cNvPr id="53" name="Table 0"/>
           <p:cNvGraphicFramePr>
             <a:graphicFrameLocks noGrp="1"/>
           </p:cNvGraphicFramePr>
@@ -19649,7 +20908,7 @@
             <a:pPr algn="ctr"/>
             <a:fld id="{F7021451-1387-4CA6-816F-3879F97B5CBC}" type="slidenum">
               <a:rPr b="1" lang="en-US"/>
-              <a:t>49</a:t>
+              <a:t>52</a:t>
             </a:fld>
             <a:endParaRPr lang="en-US"/>
           </a:p>
@@ -19663,9 +20922,9 @@
 </p:sld>
 </file>
 
-<file path=ppt/slides/slide5.xml><?xml version="1.0" encoding="utf-8"?>
+<file path=ppt/slides/slide53.xml><?xml version="1.0" encoding="utf-8"?>
 <p:sld xmlns:a="http://schemas.openxmlformats.org/drawingml/2006/main" xmlns:r="http://schemas.openxmlformats.org/officeDocument/2006/relationships" xmlns:p="http://schemas.openxmlformats.org/presentationml/2006/main">
-  <p:cSld name="Slide 5">
+  <p:cSld name="Slide 53">
     <p:spTree>
       <p:nvGrpSpPr>
         <p:cNvPr id="1" name=""/>
@@ -19713,7 +20972,7 @@
                 <a:ea typeface="Calibri" pitchFamily="34" charset="-122"/>
                 <a:cs typeface="Calibri" pitchFamily="34" charset="-120"/>
               </a:rPr>
-              <a:t>HOMEWORK CORRECTION</a:t>
+              <a:t>TEACHER'S NOTE</a:t>
             </a:r>
             <a:endParaRPr lang="en-US" sz="1400" dirty="0"/>
           </a:p>
@@ -19736,7 +20995,7 @@
         <p:spPr>
           <a:xfrm>
             <a:off x="0" y="658368"/>
-            <a:ext cx="5120640" cy="5833872"/>
+            <a:ext cx="3840480" cy="5833872"/>
           </a:xfrm>
           <a:prstGeom prst="rect">
             <a:avLst/>
@@ -19751,8 +21010,8 @@
         </p:nvSpPr>
         <p:spPr>
           <a:xfrm>
-            <a:off x="5349240" y="1005840"/>
-            <a:ext cx="6522415" cy="731520"/>
+            <a:off x="4069080" y="1005840"/>
+            <a:ext cx="7802575" cy="731520"/>
           </a:xfrm>
           <a:prstGeom prst="rect">
             <a:avLst/>
@@ -19778,7 +21037,7 @@
                 <a:ea typeface="Times New Roman" pitchFamily="34" charset="-122"/>
                 <a:cs typeface="Times New Roman" pitchFamily="34" charset="-120"/>
               </a:rPr>
-              <a:t>Correction: Possible Answer</a:t>
+              <a:t>Teacher's Note</a:t>
             </a:r>
             <a:endParaRPr lang="en-US" sz="3600" dirty="0"/>
           </a:p>
@@ -19792,8 +21051,8 @@
         </p:nvSpPr>
         <p:spPr>
           <a:xfrm>
-            <a:off x="5349240" y="1783080"/>
-            <a:ext cx="6522415" cy="4663440"/>
+            <a:off x="4069080" y="1783080"/>
+            <a:ext cx="7802575" cy="4663440"/>
           </a:xfrm>
           <a:prstGeom prst="rect">
             <a:avLst/>
@@ -19805,24 +21064,130 @@
           <a:bodyPr wrap="square" lIns="0" tIns="0" rIns="0" bIns="0" rtlCol="0" anchor="t"/>
           <a:lstStyle/>
           <a:p>
-            <a:pPr algn="l" indent="0" marL="0">
+            <a:pPr algn="l" marL="342900" indent="-342900">
               <a:spcAft>
                 <a:spcPts val="800"/>
               </a:spcAft>
-              <a:buNone/>
+              <a:buSzPct val="100000"/>
+              <a:buChar char="•"/>
             </a:pPr>
             <a:r>
-              <a:rPr lang="en-US" sz="4000" dirty="0">
+              <a:rPr lang="en-US" sz="2000" dirty="0">
                 <a:solidFill>
                   <a:srgbClr val="111111"/>
                 </a:solidFill>
-                <a:latin typeface="Times New Roman" pitchFamily="34" charset="0"/>
-                <a:ea typeface="Times New Roman" pitchFamily="34" charset="-122"/>
-                <a:cs typeface="Times New Roman" pitchFamily="34" charset="-120"/>
+                <a:latin typeface="Calibri" pitchFamily="34" charset="0"/>
+                <a:ea typeface="Calibri" pitchFamily="34" charset="-122"/>
+                <a:cs typeface="Calibri" pitchFamily="34" charset="-120"/>
               </a:rPr>
-              <a:t>In autumn the leaves turn yellow, orange, red and brown; in winter they fall and the trees stand bare until spring.</a:t>
-            </a:r>
-            <a:endParaRPr lang="en-US" sz="4000" dirty="0"/>
+              <a:t>Timing: Homework correction, plan, objectives 8 min | Recall, situation, action 10 min | 5 activities 30 min | Board summary (copying) 30 min | Evaluation, remediation 10 min | Homework, next lesson 5 min | Logbook 7 min</a:t>
+            </a:r>
+            <a:endParaRPr lang="en-US" sz="2000" dirty="0"/>
+          </a:p>
+          <a:p>
+            <a:pPr algn="l" marL="342900" indent="-342900">
+              <a:spcAft>
+                <a:spcPts val="800"/>
+              </a:spcAft>
+              <a:buSzPct val="100000"/>
+              <a:buChar char="•"/>
+            </a:pPr>
+            <a:r>
+              <a:rPr lang="en-US" sz="2000" dirty="0">
+                <a:solidFill>
+                  <a:srgbClr val="111111"/>
+                </a:solidFill>
+                <a:latin typeface="Calibri" pitchFamily="34" charset="0"/>
+                <a:ea typeface="Calibri" pitchFamily="34" charset="-122"/>
+                <a:cs typeface="Calibri" pitchFamily="34" charset="-120"/>
+              </a:rPr>
+              <a:t>Without the projector (Activity 1): describe dry-season trees.</a:t>
+            </a:r>
+            <a:endParaRPr lang="en-US" sz="2000" dirty="0"/>
+          </a:p>
+          <a:p>
+            <a:pPr algn="l" marL="342900" indent="-342900">
+              <a:spcAft>
+                <a:spcPts val="800"/>
+              </a:spcAft>
+              <a:buSzPct val="100000"/>
+              <a:buChar char="•"/>
+            </a:pPr>
+            <a:r>
+              <a:rPr lang="en-US" sz="2000" dirty="0">
+                <a:solidFill>
+                  <a:srgbClr val="111111"/>
+                </a:solidFill>
+                <a:latin typeface="Calibri" pitchFamily="34" charset="0"/>
+                <a:ea typeface="Calibri" pitchFamily="34" charset="-122"/>
+                <a:cs typeface="Calibri" pitchFamily="34" charset="-120"/>
+              </a:rPr>
+              <a:t>Without the projector (Activity 2): draw a needle leaf.</a:t>
+            </a:r>
+            <a:endParaRPr lang="en-US" sz="2000" dirty="0"/>
+          </a:p>
+          <a:p>
+            <a:pPr algn="l" marL="342900" indent="-342900">
+              <a:spcAft>
+                <a:spcPts val="800"/>
+              </a:spcAft>
+              <a:buSzPct val="100000"/>
+              <a:buChar char="•"/>
+            </a:pPr>
+            <a:r>
+              <a:rPr lang="en-US" sz="2000" dirty="0">
+                <a:solidFill>
+                  <a:srgbClr val="111111"/>
+                </a:solidFill>
+                <a:latin typeface="Calibri" pitchFamily="34" charset="0"/>
+                <a:ea typeface="Calibri" pitchFamily="34" charset="-122"/>
+                <a:cs typeface="Calibri" pitchFamily="34" charset="-120"/>
+              </a:rPr>
+              <a:t>Without the projector (Activity 3): show olive oil.</a:t>
+            </a:r>
+            <a:endParaRPr lang="en-US" sz="2000" dirty="0"/>
+          </a:p>
+          <a:p>
+            <a:pPr algn="l" marL="342900" indent="-342900">
+              <a:spcAft>
+                <a:spcPts val="800"/>
+              </a:spcAft>
+              <a:buSzPct val="100000"/>
+              <a:buChar char="•"/>
+            </a:pPr>
+            <a:r>
+              <a:rPr lang="en-US" sz="2000" dirty="0">
+                <a:solidFill>
+                  <a:srgbClr val="111111"/>
+                </a:solidFill>
+                <a:latin typeface="Calibri" pitchFamily="34" charset="0"/>
+                <a:ea typeface="Calibri" pitchFamily="34" charset="-122"/>
+                <a:cs typeface="Calibri" pitchFamily="34" charset="-120"/>
+              </a:rPr>
+              <a:t>Without the projector (Activity 4): describe a grassland.</a:t>
+            </a:r>
+            <a:endParaRPr lang="en-US" sz="2000" dirty="0"/>
+          </a:p>
+          <a:p>
+            <a:pPr algn="l" marL="342900" indent="-342900">
+              <a:spcAft>
+                <a:spcPts val="800"/>
+              </a:spcAft>
+              <a:buSzPct val="100000"/>
+              <a:buChar char="•"/>
+            </a:pPr>
+            <a:r>
+              <a:rPr lang="en-US" sz="2000" dirty="0">
+                <a:solidFill>
+                  <a:srgbClr val="111111"/>
+                </a:solidFill>
+                <a:latin typeface="Calibri" pitchFamily="34" charset="0"/>
+                <a:ea typeface="Calibri" pitchFamily="34" charset="-122"/>
+                <a:cs typeface="Calibri" pitchFamily="34" charset="-120"/>
+              </a:rPr>
+              <a:t>Without the projector (Activity 5): show dark garden soil.</a:t>
+            </a:r>
+            <a:endParaRPr lang="en-US" sz="2000" dirty="0"/>
           </a:p>
         </p:txBody>
       </p:sp>
@@ -19868,7 +21233,7 @@
             <a:pPr algn="ctr"/>
             <a:fld id="{F7021451-1387-4CA6-816F-3879F97B5CBC}" type="slidenum">
               <a:rPr b="1" lang="en-US"/>
-              <a:t>5</a:t>
+              <a:t>53</a:t>
             </a:fld>
             <a:endParaRPr lang="en-US"/>
           </a:p>
@@ -19882,9 +21247,9 @@
 </p:sld>
 </file>
 
-<file path=ppt/slides/slide50.xml><?xml version="1.0" encoding="utf-8"?>
+<file path=ppt/slides/slide54.xml><?xml version="1.0" encoding="utf-8"?>
 <p:sld xmlns:a="http://schemas.openxmlformats.org/drawingml/2006/main" xmlns:r="http://schemas.openxmlformats.org/officeDocument/2006/relationships" xmlns:p="http://schemas.openxmlformats.org/presentationml/2006/main">
-  <p:cSld name="Slide 50">
+  <p:cSld name="Slide 54">
     <p:spTree>
       <p:nvGrpSpPr>
         <p:cNvPr id="1" name=""/>
@@ -19932,7 +21297,7 @@
                 <a:ea typeface="Calibri" pitchFamily="34" charset="-122"/>
                 <a:cs typeface="Calibri" pitchFamily="34" charset="-120"/>
               </a:rPr>
-              <a:t>TEACHER'S NOTE</a:t>
+              <a:t>REFERENCES</a:t>
             </a:r>
             <a:endParaRPr lang="en-US" sz="1400" dirty="0"/>
           </a:p>
@@ -19955,7 +21320,7 @@
         <p:spPr>
           <a:xfrm>
             <a:off x="0" y="658368"/>
-            <a:ext cx="2468880" cy="5833872"/>
+            <a:ext cx="1463040" cy="5833872"/>
           </a:xfrm>
           <a:prstGeom prst="rect">
             <a:avLst/>
@@ -19970,8 +21335,8 @@
         </p:nvSpPr>
         <p:spPr>
           <a:xfrm>
-            <a:off x="2697480" y="1005840"/>
-            <a:ext cx="9174175" cy="731520"/>
+            <a:off x="1691640" y="1005840"/>
+            <a:ext cx="10180015" cy="731520"/>
           </a:xfrm>
           <a:prstGeom prst="rect">
             <a:avLst/>
@@ -19997,7 +21362,7 @@
                 <a:ea typeface="Times New Roman" pitchFamily="34" charset="-122"/>
                 <a:cs typeface="Times New Roman" pitchFamily="34" charset="-120"/>
               </a:rPr>
-              <a:t>Teacher's Note</a:t>
+              <a:t>References</a:t>
             </a:r>
             <a:endParaRPr lang="en-US" sz="3600" dirty="0"/>
           </a:p>
@@ -20011,8 +21376,8 @@
         </p:nvSpPr>
         <p:spPr>
           <a:xfrm>
-            <a:off x="2697480" y="1783080"/>
-            <a:ext cx="9174175" cy="4663440"/>
+            <a:off x="1691640" y="1783080"/>
+            <a:ext cx="10180015" cy="4663440"/>
           </a:xfrm>
           <a:prstGeom prst="rect">
             <a:avLst/>
@@ -20032,7 +21397,7 @@
               <a:buChar char="•"/>
             </a:pPr>
             <a:r>
-              <a:rPr lang="en-US" sz="2000" dirty="0">
+              <a:rPr lang="en-US" sz="1800" dirty="0">
                 <a:solidFill>
                   <a:srgbClr val="111111"/>
                 </a:solidFill>
@@ -20040,9 +21405,9 @@
                 <a:ea typeface="Calibri" pitchFamily="34" charset="-122"/>
                 <a:cs typeface="Calibri" pitchFamily="34" charset="-120"/>
               </a:rPr>
-              <a:t>Timing: Homework correction, plan, objectives 8 min | Recall, situation, action 10 min | 5 activities 30 min | Board summary (copying) 30 min | Evaluation, remediation 10 min | Homework, next lesson 5 min | Logbook 7 min</a:t>
-            </a:r>
-            <a:endParaRPr lang="en-US" sz="2000" dirty="0"/>
+              <a:t>Harmonised Progression Sheet, Economic Geography (5051), Form 2.</a:t>
+            </a:r>
+            <a:endParaRPr lang="en-US" sz="1800" dirty="0"/>
           </a:p>
           <a:p>
             <a:pPr algn="l" marL="342900" indent="-342900">
@@ -20053,7 +21418,7 @@
               <a:buChar char="•"/>
             </a:pPr>
             <a:r>
-              <a:rPr lang="en-US" sz="2000" dirty="0">
+              <a:rPr lang="en-US" sz="1800" dirty="0">
                 <a:solidFill>
                   <a:srgbClr val="111111"/>
                 </a:solidFill>
@@ -20061,9 +21426,9 @@
                 <a:ea typeface="Calibri" pitchFamily="34" charset="-122"/>
                 <a:cs typeface="Calibri" pitchFamily="34" charset="-120"/>
               </a:rPr>
-              <a:t>Without the projector (Activity 1): compare with savanna trees that lose their leaves in the dry season.</a:t>
-            </a:r>
-            <a:endParaRPr lang="en-US" sz="2000" dirty="0"/>
+              <a:t>Class textbook: The major biomes of the world (temperate regions).</a:t>
+            </a:r>
+            <a:endParaRPr lang="en-US" sz="1800" dirty="0"/>
           </a:p>
           <a:p>
             <a:pPr algn="l" marL="342900" indent="-342900">
@@ -20074,7 +21439,7 @@
               <a:buChar char="•"/>
             </a:pPr>
             <a:r>
-              <a:rPr lang="en-US" sz="2000" dirty="0">
+              <a:rPr lang="en-US" sz="1800" dirty="0">
                 <a:solidFill>
                   <a:srgbClr val="111111"/>
                 </a:solidFill>
@@ -20082,9 +21447,9 @@
                 <a:ea typeface="Calibri" pitchFamily="34" charset="-122"/>
                 <a:cs typeface="Calibri" pitchFamily="34" charset="-120"/>
               </a:rPr>
-              <a:t>Without the projector (Activity 2): show a picture of a Christmas tree (pine).</a:t>
-            </a:r>
-            <a:endParaRPr lang="en-US" sz="2000" dirty="0"/>
+              <a:t>Photo, Activity 1: “David R. Johnson Natural Area (3)” by Nicholas_T, CC BY 2.0, via Flickr (https://www.flickr.com/photos/14922165@N00/10682288495)</a:t>
+            </a:r>
+            <a:endParaRPr lang="en-US" sz="1800" dirty="0"/>
           </a:p>
           <a:p>
             <a:pPr algn="l" marL="342900" indent="-342900">
@@ -20095,7 +21460,7 @@
               <a:buChar char="•"/>
             </a:pPr>
             <a:r>
-              <a:rPr lang="en-US" sz="2000" dirty="0">
+              <a:rPr lang="en-US" sz="1800" dirty="0">
                 <a:solidFill>
                   <a:srgbClr val="111111"/>
                 </a:solidFill>
@@ -20103,9 +21468,9 @@
                 <a:ea typeface="Calibri" pitchFamily="34" charset="-122"/>
                 <a:cs typeface="Calibri" pitchFamily="34" charset="-120"/>
               </a:rPr>
-              <a:t>Without the projector (Activity 3): bring a bottle of olive oil to class.</a:t>
-            </a:r>
-            <a:endParaRPr lang="en-US" sz="2000" dirty="0"/>
+              <a:t>Photo, Activity 2: “Battleship Lake” by `James Wheeler, CC BY-NC-SA 2.0, via Flickr (https://www.flickr.com/photos/24128704@N08/16587218945)</a:t>
+            </a:r>
+            <a:endParaRPr lang="en-US" sz="1800" dirty="0"/>
           </a:p>
           <a:p>
             <a:pPr algn="l" marL="342900" indent="-342900">
@@ -20116,7 +21481,7 @@
               <a:buChar char="•"/>
             </a:pPr>
             <a:r>
-              <a:rPr lang="en-US" sz="2000" dirty="0">
+              <a:rPr lang="en-US" sz="1800" dirty="0">
                 <a:solidFill>
                   <a:srgbClr val="111111"/>
                 </a:solidFill>
@@ -20124,9 +21489,9 @@
                 <a:ea typeface="Calibri" pitchFamily="34" charset="-122"/>
                 <a:cs typeface="Calibri" pitchFamily="34" charset="-120"/>
               </a:rPr>
-              <a:t>Without the projector (Activity 4): name the temperate grasslands: Prairies, Steppes, Pampas, Veld.</a:t>
-            </a:r>
-            <a:endParaRPr lang="en-US" sz="2000" dirty="0"/>
+              <a:t>Photo, Activity 3: “Close up of an Olive Tree” by Ian W Scott, CC BY-SA 2.0, via Flickr (https://www.flickr.com/photos/38000818@N06/5767827378)</a:t>
+            </a:r>
+            <a:endParaRPr lang="en-US" sz="1800" dirty="0"/>
           </a:p>
           <a:p>
             <a:pPr algn="l" marL="342900" indent="-342900">
@@ -20137,7 +21502,7 @@
               <a:buChar char="•"/>
             </a:pPr>
             <a:r>
-              <a:rPr lang="en-US" sz="2000" dirty="0">
+              <a:rPr lang="en-US" sz="1800" dirty="0">
                 <a:solidFill>
                   <a:srgbClr val="111111"/>
                 </a:solidFill>
@@ -20145,9 +21510,51 @@
                 <a:ea typeface="Calibri" pitchFamily="34" charset="-122"/>
                 <a:cs typeface="Calibri" pitchFamily="34" charset="-120"/>
               </a:rPr>
-              <a:t>Without the projector (Activity 5): compare with the red soils of Garoua.</a:t>
-            </a:r>
-            <a:endParaRPr lang="en-US" sz="2000" dirty="0"/>
+              <a:t>Photo, Activity 4: “Saskatchewan field in August, Alfalfa Medicago sativa” by ocean.flynn, CC BY-NC-SA 2.0, via Flickr (https://www.flickr.com/photos/89488115@N00/1535397596)</a:t>
+            </a:r>
+            <a:endParaRPr lang="en-US" sz="1800" dirty="0"/>
+          </a:p>
+          <a:p>
+            <a:pPr algn="l" marL="342900" indent="-342900">
+              <a:spcAft>
+                <a:spcPts val="800"/>
+              </a:spcAft>
+              <a:buSzPct val="100000"/>
+              <a:buChar char="•"/>
+            </a:pPr>
+            <a:r>
+              <a:rPr lang="en-US" sz="1800" dirty="0">
+                <a:solidFill>
+                  <a:srgbClr val="111111"/>
+                </a:solidFill>
+                <a:latin typeface="Calibri" pitchFamily="34" charset="0"/>
+                <a:ea typeface="Calibri" pitchFamily="34" charset="-122"/>
+                <a:cs typeface="Calibri" pitchFamily="34" charset="-120"/>
+              </a:rPr>
+              <a:t>Photo, Activity 5: “My date palm. Cool, huh?” by Hair Squared, CC BY-SA 2.0, via Flickr (https://www.flickr.com/photos/73119211@N00/3804244479)</a:t>
+            </a:r>
+            <a:endParaRPr lang="en-US" sz="1800" dirty="0"/>
+          </a:p>
+          <a:p>
+            <a:pPr algn="l" marL="342900" indent="-342900">
+              <a:spcAft>
+                <a:spcPts val="800"/>
+              </a:spcAft>
+              <a:buSzPct val="100000"/>
+              <a:buChar char="•"/>
+            </a:pPr>
+            <a:r>
+              <a:rPr lang="en-US" sz="1800" dirty="0">
+                <a:solidFill>
+                  <a:srgbClr val="111111"/>
+                </a:solidFill>
+                <a:latin typeface="Calibri" pitchFamily="34" charset="0"/>
+                <a:ea typeface="Calibri" pitchFamily="34" charset="-122"/>
+                <a:cs typeface="Calibri" pitchFamily="34" charset="-120"/>
+              </a:rPr>
+              <a:t>Diagrams and animations: drawn for this lesson (Geography Department).</a:t>
+            </a:r>
+            <a:endParaRPr lang="en-US" sz="1800" dirty="0"/>
           </a:p>
         </p:txBody>
       </p:sp>
@@ -20193,374 +21600,7 @@
             <a:pPr algn="ctr"/>
             <a:fld id="{F7021451-1387-4CA6-816F-3879F97B5CBC}" type="slidenum">
               <a:rPr b="1" lang="en-US"/>
-              <a:t>50</a:t>
-            </a:fld>
-            <a:endParaRPr lang="en-US"/>
-          </a:p>
-        </p:txBody>
-      </p:sp>
-    </p:spTree>
-  </p:cSld>
-  <p:clrMapOvr>
-    <a:masterClrMapping/>
-  </p:clrMapOvr>
-</p:sld>
-</file>
-
-<file path=ppt/slides/slide51.xml><?xml version="1.0" encoding="utf-8"?>
-<p:sld xmlns:a="http://schemas.openxmlformats.org/drawingml/2006/main" xmlns:r="http://schemas.openxmlformats.org/officeDocument/2006/relationships" xmlns:p="http://schemas.openxmlformats.org/presentationml/2006/main">
-  <p:cSld name="Slide 51">
-    <p:spTree>
-      <p:nvGrpSpPr>
-        <p:cNvPr id="1" name=""/>
-        <p:cNvGrpSpPr/>
-        <p:nvPr/>
-      </p:nvGrpSpPr>
-      <p:grpSpPr>
-        <a:xfrm>
-          <a:off x="0" y="0"/>
-          <a:ext cx="0" cy="0"/>
-          <a:chOff x="0" y="0"/>
-          <a:chExt cx="0" cy="0"/>
-        </a:xfrm>
-      </p:grpSpPr>
-      <p:sp>
-        <p:nvSpPr>
-          <p:cNvPr id="2" name="Text 0"/>
-          <p:cNvSpPr/>
-          <p:nvPr/>
-        </p:nvSpPr>
-        <p:spPr>
-          <a:xfrm>
-            <a:off x="457200" y="713232"/>
-            <a:ext cx="11368735" cy="274320"/>
-          </a:xfrm>
-          <a:prstGeom prst="rect">
-            <a:avLst/>
-          </a:prstGeom>
-          <a:noFill/>
-          <a:ln/>
-        </p:spPr>
-        <p:txBody>
-          <a:bodyPr wrap="square" lIns="0" tIns="0" rIns="0" bIns="0" rtlCol="0" anchor="ctr"/>
-          <a:lstStyle/>
-          <a:p>
-            <a:pPr algn="r" indent="0" marL="0">
-              <a:buNone/>
-            </a:pPr>
-            <a:r>
-              <a:rPr lang="en-US" sz="1400" b="1" dirty="0">
-                <a:solidFill>
-                  <a:srgbClr val="1C3F6E"/>
-                </a:solidFill>
-                <a:latin typeface="Calibri" pitchFamily="34" charset="0"/>
-                <a:ea typeface="Calibri" pitchFamily="34" charset="-122"/>
-                <a:cs typeface="Calibri" pitchFamily="34" charset="-120"/>
-              </a:rPr>
-              <a:t>REFERENCES</a:t>
-            </a:r>
-            <a:endParaRPr lang="en-US" sz="1400" dirty="0"/>
-          </a:p>
-        </p:txBody>
-      </p:sp>
-      <p:pic>
-        <p:nvPicPr>
-          <p:cNvPr id="3" name="Image 0" descr="/home/claude/f4/img/minesec_sheet.png">    </p:cNvPr>
-          <p:cNvPicPr>
-            <a:picLocks noChangeAspect="1"/>
-          </p:cNvPicPr>
-          <p:nvPr/>
-        </p:nvPicPr>
-        <p:blipFill>
-          <a:blip r:embed="rId1"/>
-          <a:stretch>
-            <a:fillRect/>
-          </a:stretch>
-        </p:blipFill>
-        <p:spPr>
-          <a:xfrm>
-            <a:off x="0" y="658368"/>
-            <a:ext cx="1463040" cy="5833872"/>
-          </a:xfrm>
-          <a:prstGeom prst="rect">
-            <a:avLst/>
-          </a:prstGeom>
-        </p:spPr>
-      </p:pic>
-      <p:sp>
-        <p:nvSpPr>
-          <p:cNvPr id="4" name="Text 1"/>
-          <p:cNvSpPr/>
-          <p:nvPr/>
-        </p:nvSpPr>
-        <p:spPr>
-          <a:xfrm>
-            <a:off x="1691640" y="1005840"/>
-            <a:ext cx="10180015" cy="731520"/>
-          </a:xfrm>
-          <a:prstGeom prst="rect">
-            <a:avLst/>
-          </a:prstGeom>
-          <a:noFill/>
-          <a:ln/>
-        </p:spPr>
-        <p:txBody>
-          <a:bodyPr wrap="square" lIns="0" tIns="0" rIns="0" bIns="0" rtlCol="0" anchor="ctr">
-            <a:normAutofit/>
-          </a:bodyPr>
-          <a:lstStyle/>
-          <a:p>
-            <a:pPr algn="ctr" indent="0" marL="0">
-              <a:buNone/>
-            </a:pPr>
-            <a:r>
-              <a:rPr lang="en-US" sz="3600" b="1" dirty="0">
-                <a:solidFill>
-                  <a:srgbClr val="990011"/>
-                </a:solidFill>
-                <a:latin typeface="Times New Roman" pitchFamily="34" charset="0"/>
-                <a:ea typeface="Times New Roman" pitchFamily="34" charset="-122"/>
-                <a:cs typeface="Times New Roman" pitchFamily="34" charset="-120"/>
-              </a:rPr>
-              <a:t>References</a:t>
-            </a:r>
-            <a:endParaRPr lang="en-US" sz="3600" dirty="0"/>
-          </a:p>
-        </p:txBody>
-      </p:sp>
-      <p:sp>
-        <p:nvSpPr>
-          <p:cNvPr id="5" name="Text 2"/>
-          <p:cNvSpPr/>
-          <p:nvPr/>
-        </p:nvSpPr>
-        <p:spPr>
-          <a:xfrm>
-            <a:off x="1691640" y="1783080"/>
-            <a:ext cx="10180015" cy="4663440"/>
-          </a:xfrm>
-          <a:prstGeom prst="rect">
-            <a:avLst/>
-          </a:prstGeom>
-          <a:noFill/>
-          <a:ln/>
-        </p:spPr>
-        <p:txBody>
-          <a:bodyPr wrap="square" lIns="0" tIns="0" rIns="0" bIns="0" rtlCol="0" anchor="t"/>
-          <a:lstStyle/>
-          <a:p>
-            <a:pPr algn="l" marL="342900" indent="-342900">
-              <a:spcAft>
-                <a:spcPts val="800"/>
-              </a:spcAft>
-              <a:buSzPct val="100000"/>
-              <a:buChar char="•"/>
-            </a:pPr>
-            <a:r>
-              <a:rPr lang="en-US" sz="1800" dirty="0">
-                <a:solidFill>
-                  <a:srgbClr val="111111"/>
-                </a:solidFill>
-                <a:latin typeface="Calibri" pitchFamily="34" charset="0"/>
-                <a:ea typeface="Calibri" pitchFamily="34" charset="-122"/>
-                <a:cs typeface="Calibri" pitchFamily="34" charset="-120"/>
-              </a:rPr>
-              <a:t>Harmonised Progression Sheet, Economic Geography (5051), Form 2.</a:t>
-            </a:r>
-            <a:endParaRPr lang="en-US" sz="1800" dirty="0"/>
-          </a:p>
-          <a:p>
-            <a:pPr algn="l" marL="342900" indent="-342900">
-              <a:spcAft>
-                <a:spcPts val="800"/>
-              </a:spcAft>
-              <a:buSzPct val="100000"/>
-              <a:buChar char="•"/>
-            </a:pPr>
-            <a:r>
-              <a:rPr lang="en-US" sz="1800" dirty="0">
-                <a:solidFill>
-                  <a:srgbClr val="111111"/>
-                </a:solidFill>
-                <a:latin typeface="Calibri" pitchFamily="34" charset="0"/>
-                <a:ea typeface="Calibri" pitchFamily="34" charset="-122"/>
-                <a:cs typeface="Calibri" pitchFamily="34" charset="-120"/>
-              </a:rPr>
-              <a:t>Class textbook: The major biomes of the world (temperate regions).</a:t>
-            </a:r>
-            <a:endParaRPr lang="en-US" sz="1800" dirty="0"/>
-          </a:p>
-          <a:p>
-            <a:pPr algn="l" marL="342900" indent="-342900">
-              <a:spcAft>
-                <a:spcPts val="800"/>
-              </a:spcAft>
-              <a:buSzPct val="100000"/>
-              <a:buChar char="•"/>
-            </a:pPr>
-            <a:r>
-              <a:rPr lang="en-US" sz="1800" dirty="0">
-                <a:solidFill>
-                  <a:srgbClr val="111111"/>
-                </a:solidFill>
-                <a:latin typeface="Calibri" pitchFamily="34" charset="0"/>
-                <a:ea typeface="Calibri" pitchFamily="34" charset="-122"/>
-                <a:cs typeface="Calibri" pitchFamily="34" charset="-120"/>
-              </a:rPr>
-              <a:t>Photo, Activity 1: “David R. Johnson Natural Area (3)” by Nicholas_T, CC BY 2.0, via Flickr (https://www.flickr.com/photos/14922165@N00/10682288495)</a:t>
-            </a:r>
-            <a:endParaRPr lang="en-US" sz="1800" dirty="0"/>
-          </a:p>
-          <a:p>
-            <a:pPr algn="l" marL="342900" indent="-342900">
-              <a:spcAft>
-                <a:spcPts val="800"/>
-              </a:spcAft>
-              <a:buSzPct val="100000"/>
-              <a:buChar char="•"/>
-            </a:pPr>
-            <a:r>
-              <a:rPr lang="en-US" sz="1800" dirty="0">
-                <a:solidFill>
-                  <a:srgbClr val="111111"/>
-                </a:solidFill>
-                <a:latin typeface="Calibri" pitchFamily="34" charset="0"/>
-                <a:ea typeface="Calibri" pitchFamily="34" charset="-122"/>
-                <a:cs typeface="Calibri" pitchFamily="34" charset="-120"/>
-              </a:rPr>
-              <a:t>Photo, Activity 2: “Battleship Lake” by `James Wheeler, CC BY-NC-SA 2.0, via Flickr (https://www.flickr.com/photos/24128704@N08/16587218945)</a:t>
-            </a:r>
-            <a:endParaRPr lang="en-US" sz="1800" dirty="0"/>
-          </a:p>
-          <a:p>
-            <a:pPr algn="l" marL="342900" indent="-342900">
-              <a:spcAft>
-                <a:spcPts val="800"/>
-              </a:spcAft>
-              <a:buSzPct val="100000"/>
-              <a:buChar char="•"/>
-            </a:pPr>
-            <a:r>
-              <a:rPr lang="en-US" sz="1800" dirty="0">
-                <a:solidFill>
-                  <a:srgbClr val="111111"/>
-                </a:solidFill>
-                <a:latin typeface="Calibri" pitchFamily="34" charset="0"/>
-                <a:ea typeface="Calibri" pitchFamily="34" charset="-122"/>
-                <a:cs typeface="Calibri" pitchFamily="34" charset="-120"/>
-              </a:rPr>
-              <a:t>Photo, Activity 3: “Close up of an Olive Tree” by Ian W Scott, CC BY-SA 2.0, via Flickr (https://www.flickr.com/photos/38000818@N06/5767827378)</a:t>
-            </a:r>
-            <a:endParaRPr lang="en-US" sz="1800" dirty="0"/>
-          </a:p>
-          <a:p>
-            <a:pPr algn="l" marL="342900" indent="-342900">
-              <a:spcAft>
-                <a:spcPts val="800"/>
-              </a:spcAft>
-              <a:buSzPct val="100000"/>
-              <a:buChar char="•"/>
-            </a:pPr>
-            <a:r>
-              <a:rPr lang="en-US" sz="1800" dirty="0">
-                <a:solidFill>
-                  <a:srgbClr val="111111"/>
-                </a:solidFill>
-                <a:latin typeface="Calibri" pitchFamily="34" charset="0"/>
-                <a:ea typeface="Calibri" pitchFamily="34" charset="-122"/>
-                <a:cs typeface="Calibri" pitchFamily="34" charset="-120"/>
-              </a:rPr>
-              <a:t>Photo, Activity 4: “Saskatchewan field in August, Alfalfa Medicago sativa” by ocean.flynn, CC BY-NC-SA 2.0, via Flickr (https://www.flickr.com/photos/89488115@N00/1535397596)</a:t>
-            </a:r>
-            <a:endParaRPr lang="en-US" sz="1800" dirty="0"/>
-          </a:p>
-          <a:p>
-            <a:pPr algn="l" marL="342900" indent="-342900">
-              <a:spcAft>
-                <a:spcPts val="800"/>
-              </a:spcAft>
-              <a:buSzPct val="100000"/>
-              <a:buChar char="•"/>
-            </a:pPr>
-            <a:r>
-              <a:rPr lang="en-US" sz="1800" dirty="0">
-                <a:solidFill>
-                  <a:srgbClr val="111111"/>
-                </a:solidFill>
-                <a:latin typeface="Calibri" pitchFamily="34" charset="0"/>
-                <a:ea typeface="Calibri" pitchFamily="34" charset="-122"/>
-                <a:cs typeface="Calibri" pitchFamily="34" charset="-120"/>
-              </a:rPr>
-              <a:t>Photo, Activity 5: “My date palm. Cool, huh?” by Hair Squared, CC BY-SA 2.0, via Flickr (https://www.flickr.com/photos/73119211@N00/3804244479)</a:t>
-            </a:r>
-            <a:endParaRPr lang="en-US" sz="1800" dirty="0"/>
-          </a:p>
-          <a:p>
-            <a:pPr algn="l" marL="342900" indent="-342900">
-              <a:spcAft>
-                <a:spcPts val="800"/>
-              </a:spcAft>
-              <a:buSzPct val="100000"/>
-              <a:buChar char="•"/>
-            </a:pPr>
-            <a:r>
-              <a:rPr lang="en-US" sz="1800" dirty="0">
-                <a:solidFill>
-                  <a:srgbClr val="111111"/>
-                </a:solidFill>
-                <a:latin typeface="Calibri" pitchFamily="34" charset="0"/>
-                <a:ea typeface="Calibri" pitchFamily="34" charset="-122"/>
-                <a:cs typeface="Calibri" pitchFamily="34" charset="-120"/>
-              </a:rPr>
-              <a:t>Diagrams and animations: drawn for this lesson (Geography Department).</a:t>
-            </a:r>
-            <a:endParaRPr lang="en-US" sz="1800" dirty="0"/>
-          </a:p>
-        </p:txBody>
-      </p:sp>
-      <p:sp>
-        <p:nvSpPr>
-          <p:cNvPr id="25" name="Slide Number Placeholder 0"/>
-          <p:cNvSpPr>
-            <a:spLocks noGrp="1"/>
-          </p:cNvSpPr>
-          <p:nvPr>
-            <p:ph type="sldNum" sz="quarter" idx="4294967295"/>
-          </p:nvPr>
-        </p:nvSpPr>
-        <p:spPr>
-          <a:xfrm>
-            <a:off x="27432" y="91440"/>
-            <a:ext cx="585216" cy="475488"/>
-          </a:xfrm>
-          <a:prstGeom prst="rect">
-            <a:avLst/>
-          </a:prstGeom>
-          <a:extLst>
-            <a:ext uri="{C572A759-6A51-4108-AA02-DFA0A04FC94B}">
-              <ma14:wrappingTextBoxFlag xmlns:ma14="http://schemas.microsoft.com/office/mac/drawingml/2011/main" val="0"/>
-            </a:ext>
-          </a:extLst>
-        </p:spPr>
-        <p:txBody>
-          <a:bodyPr/>
-          <a:lstStyle>
-            <a:lvl1pPr>
-              <a:defRPr sz="2000">
-                <a:solidFill>
-                  <a:srgbClr val="FFFFFF"/>
-                </a:solidFill>
-                <a:latin typeface="Calibri"/>
-                <a:ea typeface="Calibri"/>
-                <a:cs typeface="Calibri"/>
-              </a:defRPr>
-            </a:lvl1pPr>
-          </a:lstStyle>
-          <a:p>
-            <a:pPr algn="ctr"/>
-            <a:fld id="{F7021451-1387-4CA6-816F-3879F97B5CBC}" type="slidenum">
-              <a:rPr b="1" lang="en-US"/>
-              <a:t>51</a:t>
+              <a:t>54</a:t>
             </a:fld>
             <a:endParaRPr lang="en-US"/>
           </a:p>

--- a/lecons/F2T/17_S11_L4_P2_Temperate_Soils_Vegetation.pptx
+++ b/lecons/F2T/17_S11_L4_P2_Temperate_Soils_Vegetation.pptx
@@ -3459,7 +3459,7 @@
           <a:p>
             <a:r>
               <a:rPr lang="en-US" dirty="0"/>
-              <a:t>Before we start the new lesson, let us correct the homework I gave you at the end of Lesson 4 (Part 1): The Temperate Region: Location, Types and Characteristics (Climate). The question was: Find a picture of a European forest in autumn in your textbook or on television. Describe the colour of the leaves and say what happens to them in winter. Take out your exercise books.</a:t>
+              <a:t>Before we start the new lesson, let us correct the homework I gave you at the end of Lesson 4 (Part 1): The Temperate Region: Location, Types and Characteristics (Climate). The question was: Define a deciduous tree. Take out your exercise books.</a:t>
             </a:r>
             <a:endParaRPr lang="en-US" dirty="0"/>
           </a:p>
@@ -4251,7 +4251,7 @@
           <a:p>
             <a:r>
               <a:rPr lang="en-US" dirty="0"/>
-              <a:t>For your homework: Find the names of three food products imported into Cameroon from temperate countries (for example wheat flour, milk or apples). We shall correct it at the beginning of our next lesson.</a:t>
+              <a:t>For your homework: Define mixed farming. We shall correct it at the beginning of our next lesson.</a:t>
             </a:r>
             <a:endParaRPr lang="en-US" dirty="0"/>
           </a:p>
@@ -4427,7 +4427,7 @@
           <a:p>
             <a:r>
               <a:rPr lang="en-US" dirty="0"/>
-              <a:t>Here is a good answer. In autumn the leaves turn yellow, orange, red and brown; in winter they fall and the trees stand bare until spring. Compare it with your own answer and correct your work in red.</a:t>
+              <a:t>Here is a good answer. It is a tree that loses its leaves in one season. Compare it with your own answer and correct your work in red.</a:t>
             </a:r>
             <a:endParaRPr lang="en-US" dirty="0"/>
           </a:p>
@@ -15079,7 +15079,7 @@
         <p:spPr>
           <a:xfrm>
             <a:off x="0" y="658368"/>
-            <a:ext cx="1463040" cy="5833872"/>
+            <a:ext cx="5120640" cy="5833872"/>
           </a:xfrm>
           <a:prstGeom prst="rect">
             <a:avLst/>
@@ -15094,8 +15094,8 @@
         </p:nvSpPr>
         <p:spPr>
           <a:xfrm>
-            <a:off x="1691640" y="1005840"/>
-            <a:ext cx="10180015" cy="731520"/>
+            <a:off x="5349240" y="1005840"/>
+            <a:ext cx="6522415" cy="731520"/>
           </a:xfrm>
           <a:prstGeom prst="rect">
             <a:avLst/>
@@ -15135,8 +15135,8 @@
         </p:nvSpPr>
         <p:spPr>
           <a:xfrm>
-            <a:off x="1691640" y="1783080"/>
-            <a:ext cx="10180015" cy="4663440"/>
+            <a:off x="5349240" y="1783080"/>
+            <a:ext cx="6522415" cy="4663440"/>
           </a:xfrm>
           <a:prstGeom prst="rect">
             <a:avLst/>
@@ -15183,7 +15183,7 @@
                 <a:ea typeface="Times New Roman" pitchFamily="34" charset="-122"/>
                 <a:cs typeface="Times New Roman" pitchFamily="34" charset="-120"/>
               </a:rPr>
-              <a:t>Find a picture of a European forest in autumn in your textbook or on television. Describe the colour of the leaves and say what happens to them in winter.</a:t>
+              <a:t>Define a deciduous tree.</a:t>
             </a:r>
             <a:endParaRPr lang="en-US" sz="4000" dirty="0"/>
           </a:p>
@@ -17375,7 +17375,7 @@
                 <a:ea typeface="Times New Roman" pitchFamily="34" charset="-122"/>
                 <a:cs typeface="Times New Roman" pitchFamily="34" charset="-120"/>
               </a:rPr>
-              <a:t>Find the names of three food products imported into Cameroon from temperate countries (for example wheat flour, milk or apples).</a:t>
+              <a:t>Define mixed farming.</a:t>
             </a:r>
             <a:endParaRPr lang="en-US" sz="4000" dirty="0"/>
           </a:p>
@@ -17833,7 +17833,7 @@
                 <a:ea typeface="Times New Roman" pitchFamily="34" charset="-122"/>
                 <a:cs typeface="Times New Roman" pitchFamily="34" charset="-120"/>
               </a:rPr>
-              <a:t>In autumn the leaves turn yellow, orange, red and brown; in winter they fall and the trees stand bare until spring.</a:t>
+              <a:t>It is a tree that loses its leaves in one season.</a:t>
             </a:r>
             <a:endParaRPr lang="en-US" sz="4000" dirty="0"/>
           </a:p>
@@ -20534,7 +20534,7 @@
                           <a:ea typeface="Calibri" pitchFamily="34" charset="-122"/>
                           <a:cs typeface="Calibri" pitchFamily="34" charset="-120"/>
                         </a:rPr>
-                        <a:t>Find the names of three food products imported into Cameroon from temperate countries (for example wheat flour, milk or apples).</a:t>
+                        <a:t>Define mixed farming.</a:t>
                       </a:r>
                       <a:endParaRPr lang="en-US" sz="1600" dirty="0">
                         <a:latin typeface="Calibri" charset="0"/>
